--- a/Yathzee Docs/YATHZEE Presentatie.pptx
+++ b/Yathzee Docs/YATHZEE Presentatie.pptx
@@ -5,7 +5,13 @@
     <p:sldMasterId id="2147483648" r:id="rId1"/>
   </p:sldMasterIdLst>
   <p:sldIdLst>
-    <p:sldId id="256" r:id="rId2"/>
+    <p:sldId id="260" r:id="rId2"/>
+    <p:sldId id="261" r:id="rId3"/>
+    <p:sldId id="257" r:id="rId4"/>
+    <p:sldId id="258" r:id="rId5"/>
+    <p:sldId id="262" r:id="rId6"/>
+    <p:sldId id="263" r:id="rId7"/>
+    <p:sldId id="265" r:id="rId8"/>
   </p:sldIdLst>
   <p:sldSz cx="12192000" cy="6858000"/>
   <p:notesSz cx="6858000" cy="9144000"/>
@@ -104,6 +110,11 @@
       </a:defRPr>
     </a:lvl9pPr>
   </p:defaultTextStyle>
+  <p:extLst>
+    <p:ext uri="{EFAFB233-063F-42B5-8137-9DF3F51BA10A}">
+      <p15:sldGuideLst xmlns:p15="http://schemas.microsoft.com/office/powerpoint/2012/main"/>
+    </p:ext>
+  </p:extLst>
 </p:presentation>
 </file>
 
@@ -3326,7 +3337,7 @@
           <p:cNvPr id="2" name="Titel 1">
             <a:extLst>
               <a:ext uri="{FF2B5EF4-FFF2-40B4-BE49-F238E27FC236}">
-                <a16:creationId xmlns:a16="http://schemas.microsoft.com/office/drawing/2014/main" id="{E7AA7D37-7021-E5BB-274E-CA9A37E7E5FD}"/>
+                <a16:creationId xmlns:a16="http://schemas.microsoft.com/office/drawing/2014/main" id="{C524484A-E3CD-79F5-242E-C5236E704FC1}"/>
               </a:ext>
             </a:extLst>
           </p:cNvPr>
@@ -3343,10 +3354,10 @@
           <a:lstStyle/>
           <a:p>
             <a:r>
-              <a:rPr lang="en-US" b="1"/>
-              <a:t>YATHZEE</a:t>
-            </a:r>
-            <a:endParaRPr lang="nl-NL" b="1"/>
+              <a:rPr lang="en-US"/>
+              <a:t>MEESTERPROEF</a:t>
+            </a:r>
+            <a:endParaRPr lang="nl-NL"/>
           </a:p>
         </p:txBody>
       </p:sp>
@@ -3355,7 +3366,7 @@
           <p:cNvPr id="3" name="Ondertitel 2">
             <a:extLst>
               <a:ext uri="{FF2B5EF4-FFF2-40B4-BE49-F238E27FC236}">
-                <a16:creationId xmlns:a16="http://schemas.microsoft.com/office/drawing/2014/main" id="{72B59EB4-6104-A838-2B5E-1BED1E0E0588}"/>
+                <a16:creationId xmlns:a16="http://schemas.microsoft.com/office/drawing/2014/main" id="{76748790-0461-6F67-8964-00FA3558C1EB}"/>
               </a:ext>
             </a:extLst>
           </p:cNvPr>
@@ -3372,23 +3383,3033 @@
           <a:lstStyle/>
           <a:p>
             <a:r>
-              <a:rPr lang="en-US">
-                <a:latin typeface="Arial Nova" panose="020F0502020204030204" pitchFamily="34" charset="0"/>
-                <a:cs typeface="Helvetica" panose="020B0604020202020204" pitchFamily="34" charset="0"/>
-              </a:rPr>
-              <a:t>Meesterproef – Door Tymo van der Hoogt</a:t>
-            </a:r>
-            <a:endParaRPr lang="nl-NL">
-              <a:latin typeface="Arial Nova" panose="020F0502020204030204" pitchFamily="34" charset="0"/>
-              <a:cs typeface="Helvetica" panose="020B0604020202020204" pitchFamily="34" charset="0"/>
-            </a:endParaRPr>
+              <a:rPr lang="en-US"/>
+              <a:t>Door Tymo van der Hoogt</a:t>
+            </a:r>
+            <a:endParaRPr lang="nl-NL"/>
           </a:p>
         </p:txBody>
       </p:sp>
     </p:spTree>
     <p:extLst>
       <p:ext uri="{BB962C8B-B14F-4D97-AF65-F5344CB8AC3E}">
-        <p14:creationId xmlns:p14="http://schemas.microsoft.com/office/powerpoint/2010/main" val="696597432"/>
+        <p14:creationId xmlns:p14="http://schemas.microsoft.com/office/powerpoint/2010/main" val="1547685182"/>
+      </p:ext>
+    </p:extLst>
+  </p:cSld>
+  <p:clrMapOvr>
+    <a:masterClrMapping/>
+  </p:clrMapOvr>
+</p:sld>
+</file>
+
+<file path=ppt/slides/slide2.xml><?xml version="1.0" encoding="utf-8"?>
+<p:sld xmlns:a="http://schemas.openxmlformats.org/drawingml/2006/main" xmlns:r="http://schemas.openxmlformats.org/officeDocument/2006/relationships" xmlns:p="http://schemas.openxmlformats.org/presentationml/2006/main">
+  <p:cSld>
+    <p:bg>
+      <p:bgPr>
+        <a:solidFill>
+          <a:schemeClr val="bg1"/>
+        </a:solidFill>
+        <a:effectLst/>
+      </p:bgPr>
+    </p:bg>
+    <p:spTree>
+      <p:nvGrpSpPr>
+        <p:cNvPr id="1" name=""/>
+        <p:cNvGrpSpPr/>
+        <p:nvPr/>
+      </p:nvGrpSpPr>
+      <p:grpSpPr>
+        <a:xfrm>
+          <a:off x="0" y="0"/>
+          <a:ext cx="0" cy="0"/>
+          <a:chOff x="0" y="0"/>
+          <a:chExt cx="0" cy="0"/>
+        </a:xfrm>
+      </p:grpSpPr>
+      <p:sp useBgFill="1">
+        <p:nvSpPr>
+          <p:cNvPr id="12" name="Rectangle 11">
+            <a:extLst>
+              <a:ext uri="{FF2B5EF4-FFF2-40B4-BE49-F238E27FC236}">
+                <a16:creationId xmlns:a16="http://schemas.microsoft.com/office/drawing/2014/main" id="{352BEC0E-22F8-46D0-9632-375DB541B06C}"/>
+              </a:ext>
+              <a:ext uri="{C183D7F6-B498-43B3-948B-1728B52AA6E4}">
+                <adec:decorative xmlns:adec="http://schemas.microsoft.com/office/drawing/2017/decorative" val="1"/>
+              </a:ext>
+            </a:extLst>
+          </p:cNvPr>
+          <p:cNvSpPr>
+            <a:spLocks noGrp="1" noRot="1" noChangeAspect="1" noMove="1" noResize="1" noEditPoints="1" noAdjustHandles="1" noChangeArrowheads="1" noChangeShapeType="1" noTextEdit="1"/>
+          </p:cNvSpPr>
+          <p:nvPr>
+            <p:extLst>
+              <p:ext uri="{386F3935-93C4-4BCD-93E2-E3B085C9AB24}">
+                <p16:designElem xmlns:p16="http://schemas.microsoft.com/office/powerpoint/2015/main" val="1"/>
+              </p:ext>
+            </p:extLst>
+          </p:nvPr>
+        </p:nvSpPr>
+        <p:spPr>
+          <a:xfrm>
+            <a:off x="0" y="0"/>
+            <a:ext cx="12188952" cy="6858000"/>
+          </a:xfrm>
+          <a:prstGeom prst="rect">
+            <a:avLst/>
+          </a:prstGeom>
+          <a:ln>
+            <a:noFill/>
+          </a:ln>
+        </p:spPr>
+        <p:style>
+          <a:lnRef idx="2">
+            <a:schemeClr val="accent1">
+              <a:shade val="50000"/>
+            </a:schemeClr>
+          </a:lnRef>
+          <a:fillRef idx="1">
+            <a:schemeClr val="accent1"/>
+          </a:fillRef>
+          <a:effectRef idx="0">
+            <a:schemeClr val="accent1"/>
+          </a:effectRef>
+          <a:fontRef idx="minor">
+            <a:schemeClr val="lt1"/>
+          </a:fontRef>
+        </p:style>
+        <p:txBody>
+          <a:bodyPr rtlCol="0" anchor="ctr"/>
+          <a:lstStyle/>
+          <a:p>
+            <a:pPr algn="ctr"/>
+            <a:endParaRPr lang="en-US"/>
+          </a:p>
+        </p:txBody>
+      </p:sp>
+      <p:sp>
+        <p:nvSpPr>
+          <p:cNvPr id="2" name="Titel 1">
+            <a:extLst>
+              <a:ext uri="{FF2B5EF4-FFF2-40B4-BE49-F238E27FC236}">
+                <a16:creationId xmlns:a16="http://schemas.microsoft.com/office/drawing/2014/main" id="{AE345903-ACB3-7C5F-29BE-D64F60121104}"/>
+              </a:ext>
+            </a:extLst>
+          </p:cNvPr>
+          <p:cNvSpPr>
+            <a:spLocks noGrp="1"/>
+          </p:cNvSpPr>
+          <p:nvPr>
+            <p:ph type="title"/>
+          </p:nvPr>
+        </p:nvSpPr>
+        <p:spPr>
+          <a:xfrm>
+            <a:off x="640080" y="329184"/>
+            <a:ext cx="6894576" cy="1783080"/>
+          </a:xfrm>
+        </p:spPr>
+        <p:txBody>
+          <a:bodyPr anchor="b">
+            <a:normAutofit/>
+          </a:bodyPr>
+          <a:lstStyle/>
+          <a:p>
+            <a:r>
+              <a:rPr lang="en-US" sz="5400" b="1"/>
+              <a:t>PROJECT</a:t>
+            </a:r>
+            <a:endParaRPr lang="nl-NL" sz="5400" b="1"/>
+          </a:p>
+        </p:txBody>
+      </p:sp>
+      <p:sp>
+        <p:nvSpPr>
+          <p:cNvPr id="14" name="sketch line">
+            <a:extLst>
+              <a:ext uri="{FF2B5EF4-FFF2-40B4-BE49-F238E27FC236}">
+                <a16:creationId xmlns:a16="http://schemas.microsoft.com/office/drawing/2014/main" id="{3FCFB1DE-0B7E-48CC-BA90-B2AB0889F9D6}"/>
+              </a:ext>
+              <a:ext uri="{C183D7F6-B498-43B3-948B-1728B52AA6E4}">
+                <adec:decorative xmlns:adec="http://schemas.microsoft.com/office/drawing/2017/decorative" val="1"/>
+              </a:ext>
+            </a:extLst>
+          </p:cNvPr>
+          <p:cNvSpPr>
+            <a:spLocks noGrp="1" noRot="1" noChangeAspect="1" noMove="1" noResize="1" noEditPoints="1" noAdjustHandles="1" noChangeArrowheads="1" noChangeShapeType="1" noTextEdit="1"/>
+          </p:cNvSpPr>
+          <p:nvPr>
+            <p:extLst>
+              <p:ext uri="{386F3935-93C4-4BCD-93E2-E3B085C9AB24}">
+                <p16:designElem xmlns:p16="http://schemas.microsoft.com/office/powerpoint/2015/main" val="1"/>
+              </p:ext>
+            </p:extLst>
+          </p:nvPr>
+        </p:nvSpPr>
+        <p:spPr>
+          <a:xfrm>
+            <a:off x="758952" y="2395728"/>
+            <a:ext cx="4243589" cy="18288"/>
+          </a:xfrm>
+          <a:custGeom>
+            <a:avLst/>
+            <a:gdLst>
+              <a:gd name="csX0" fmla="*/ 0 w 4243589"/>
+              <a:gd name="csY0" fmla="*/ 0 h 18288"/>
+              <a:gd name="csX1" fmla="*/ 478919 w 4243589"/>
+              <a:gd name="csY1" fmla="*/ 0 h 18288"/>
+              <a:gd name="csX2" fmla="*/ 957839 w 4243589"/>
+              <a:gd name="csY2" fmla="*/ 0 h 18288"/>
+              <a:gd name="csX3" fmla="*/ 1521630 w 4243589"/>
+              <a:gd name="csY3" fmla="*/ 0 h 18288"/>
+              <a:gd name="csX4" fmla="*/ 2212729 w 4243589"/>
+              <a:gd name="csY4" fmla="*/ 0 h 18288"/>
+              <a:gd name="csX5" fmla="*/ 2734084 w 4243589"/>
+              <a:gd name="csY5" fmla="*/ 0 h 18288"/>
+              <a:gd name="csX6" fmla="*/ 3255439 w 4243589"/>
+              <a:gd name="csY6" fmla="*/ 0 h 18288"/>
+              <a:gd name="csX7" fmla="*/ 4243589 w 4243589"/>
+              <a:gd name="csY7" fmla="*/ 0 h 18288"/>
+              <a:gd name="csX8" fmla="*/ 4243589 w 4243589"/>
+              <a:gd name="csY8" fmla="*/ 18288 h 18288"/>
+              <a:gd name="csX9" fmla="*/ 3594926 w 4243589"/>
+              <a:gd name="csY9" fmla="*/ 18288 h 18288"/>
+              <a:gd name="csX10" fmla="*/ 3073571 w 4243589"/>
+              <a:gd name="csY10" fmla="*/ 18288 h 18288"/>
+              <a:gd name="csX11" fmla="*/ 2552216 w 4243589"/>
+              <a:gd name="csY11" fmla="*/ 18288 h 18288"/>
+              <a:gd name="csX12" fmla="*/ 1903553 w 4243589"/>
+              <a:gd name="csY12" fmla="*/ 18288 h 18288"/>
+              <a:gd name="csX13" fmla="*/ 1212454 w 4243589"/>
+              <a:gd name="csY13" fmla="*/ 18288 h 18288"/>
+              <a:gd name="csX14" fmla="*/ 733535 w 4243589"/>
+              <a:gd name="csY14" fmla="*/ 18288 h 18288"/>
+              <a:gd name="csX15" fmla="*/ 0 w 4243589"/>
+              <a:gd name="csY15" fmla="*/ 18288 h 18288"/>
+              <a:gd name="csX16" fmla="*/ 0 w 4243589"/>
+              <a:gd name="csY16" fmla="*/ 0 h 18288"/>
+            </a:gdLst>
+            <a:ahLst/>
+            <a:cxnLst>
+              <a:cxn ang="0">
+                <a:pos x="csX0" y="csY0"/>
+              </a:cxn>
+              <a:cxn ang="0">
+                <a:pos x="csX1" y="csY1"/>
+              </a:cxn>
+              <a:cxn ang="0">
+                <a:pos x="csX2" y="csY2"/>
+              </a:cxn>
+              <a:cxn ang="0">
+                <a:pos x="csX3" y="csY3"/>
+              </a:cxn>
+              <a:cxn ang="0">
+                <a:pos x="csX4" y="csY4"/>
+              </a:cxn>
+              <a:cxn ang="0">
+                <a:pos x="csX5" y="csY5"/>
+              </a:cxn>
+              <a:cxn ang="0">
+                <a:pos x="csX6" y="csY6"/>
+              </a:cxn>
+              <a:cxn ang="0">
+                <a:pos x="csX7" y="csY7"/>
+              </a:cxn>
+              <a:cxn ang="0">
+                <a:pos x="csX8" y="csY8"/>
+              </a:cxn>
+              <a:cxn ang="0">
+                <a:pos x="csX9" y="csY9"/>
+              </a:cxn>
+              <a:cxn ang="0">
+                <a:pos x="csX10" y="csY10"/>
+              </a:cxn>
+              <a:cxn ang="0">
+                <a:pos x="csX11" y="csY11"/>
+              </a:cxn>
+              <a:cxn ang="0">
+                <a:pos x="csX12" y="csY12"/>
+              </a:cxn>
+              <a:cxn ang="0">
+                <a:pos x="csX13" y="csY13"/>
+              </a:cxn>
+              <a:cxn ang="0">
+                <a:pos x="csX14" y="csY14"/>
+              </a:cxn>
+              <a:cxn ang="0">
+                <a:pos x="csX15" y="csY15"/>
+              </a:cxn>
+              <a:cxn ang="0">
+                <a:pos x="csX16" y="csY16"/>
+              </a:cxn>
+            </a:cxnLst>
+            <a:rect l="l" t="t" r="r" b="b"/>
+            <a:pathLst>
+              <a:path w="4243589" h="18288" fill="none" extrusionOk="0">
+                <a:moveTo>
+                  <a:pt x="0" y="0"/>
+                </a:moveTo>
+                <a:cubicBezTo>
+                  <a:pt x="213395" y="-21006"/>
+                  <a:pt x="307421" y="-18116"/>
+                  <a:pt x="478919" y="0"/>
+                </a:cubicBezTo>
+                <a:cubicBezTo>
+                  <a:pt x="650417" y="18116"/>
+                  <a:pt x="831092" y="-21237"/>
+                  <a:pt x="957839" y="0"/>
+                </a:cubicBezTo>
+                <a:cubicBezTo>
+                  <a:pt x="1084586" y="21237"/>
+                  <a:pt x="1301682" y="25124"/>
+                  <a:pt x="1521630" y="0"/>
+                </a:cubicBezTo>
+                <a:cubicBezTo>
+                  <a:pt x="1741578" y="-25124"/>
+                  <a:pt x="1970269" y="-29139"/>
+                  <a:pt x="2212729" y="0"/>
+                </a:cubicBezTo>
+                <a:cubicBezTo>
+                  <a:pt x="2455189" y="29139"/>
+                  <a:pt x="2558847" y="-4796"/>
+                  <a:pt x="2734084" y="0"/>
+                </a:cubicBezTo>
+                <a:cubicBezTo>
+                  <a:pt x="2909321" y="4796"/>
+                  <a:pt x="3097217" y="-13409"/>
+                  <a:pt x="3255439" y="0"/>
+                </a:cubicBezTo>
+                <a:cubicBezTo>
+                  <a:pt x="3413662" y="13409"/>
+                  <a:pt x="3979999" y="-10121"/>
+                  <a:pt x="4243589" y="0"/>
+                </a:cubicBezTo>
+                <a:cubicBezTo>
+                  <a:pt x="4244484" y="8974"/>
+                  <a:pt x="4243043" y="9359"/>
+                  <a:pt x="4243589" y="18288"/>
+                </a:cubicBezTo>
+                <a:cubicBezTo>
+                  <a:pt x="4058777" y="31246"/>
+                  <a:pt x="3910348" y="3158"/>
+                  <a:pt x="3594926" y="18288"/>
+                </a:cubicBezTo>
+                <a:cubicBezTo>
+                  <a:pt x="3279504" y="33418"/>
+                  <a:pt x="3319955" y="-3977"/>
+                  <a:pt x="3073571" y="18288"/>
+                </a:cubicBezTo>
+                <a:cubicBezTo>
+                  <a:pt x="2827187" y="40553"/>
+                  <a:pt x="2767387" y="1863"/>
+                  <a:pt x="2552216" y="18288"/>
+                </a:cubicBezTo>
+                <a:cubicBezTo>
+                  <a:pt x="2337046" y="34713"/>
+                  <a:pt x="2181871" y="19527"/>
+                  <a:pt x="1903553" y="18288"/>
+                </a:cubicBezTo>
+                <a:cubicBezTo>
+                  <a:pt x="1625235" y="17049"/>
+                  <a:pt x="1557672" y="24174"/>
+                  <a:pt x="1212454" y="18288"/>
+                </a:cubicBezTo>
+                <a:cubicBezTo>
+                  <a:pt x="867236" y="12402"/>
+                  <a:pt x="874382" y="15627"/>
+                  <a:pt x="733535" y="18288"/>
+                </a:cubicBezTo>
+                <a:cubicBezTo>
+                  <a:pt x="592688" y="20949"/>
+                  <a:pt x="183477" y="14753"/>
+                  <a:pt x="0" y="18288"/>
+                </a:cubicBezTo>
+                <a:cubicBezTo>
+                  <a:pt x="-229" y="14222"/>
+                  <a:pt x="509" y="5816"/>
+                  <a:pt x="0" y="0"/>
+                </a:cubicBezTo>
+                <a:close/>
+              </a:path>
+              <a:path w="4243589" h="18288" stroke="0" extrusionOk="0">
+                <a:moveTo>
+                  <a:pt x="0" y="0"/>
+                </a:moveTo>
+                <a:cubicBezTo>
+                  <a:pt x="143690" y="16630"/>
+                  <a:pt x="266667" y="14847"/>
+                  <a:pt x="521355" y="0"/>
+                </a:cubicBezTo>
+                <a:cubicBezTo>
+                  <a:pt x="776043" y="-14847"/>
+                  <a:pt x="814491" y="-17363"/>
+                  <a:pt x="1000275" y="0"/>
+                </a:cubicBezTo>
+                <a:cubicBezTo>
+                  <a:pt x="1186059" y="17363"/>
+                  <a:pt x="1352504" y="-23507"/>
+                  <a:pt x="1521630" y="0"/>
+                </a:cubicBezTo>
+                <a:cubicBezTo>
+                  <a:pt x="1690756" y="23507"/>
+                  <a:pt x="1889525" y="5871"/>
+                  <a:pt x="2127857" y="0"/>
+                </a:cubicBezTo>
+                <a:cubicBezTo>
+                  <a:pt x="2366189" y="-5871"/>
+                  <a:pt x="2620628" y="-27997"/>
+                  <a:pt x="2776520" y="0"/>
+                </a:cubicBezTo>
+                <a:cubicBezTo>
+                  <a:pt x="2932412" y="27997"/>
+                  <a:pt x="3131683" y="-25073"/>
+                  <a:pt x="3467618" y="0"/>
+                </a:cubicBezTo>
+                <a:cubicBezTo>
+                  <a:pt x="3803553" y="25073"/>
+                  <a:pt x="4017371" y="3071"/>
+                  <a:pt x="4243589" y="0"/>
+                </a:cubicBezTo>
+                <a:cubicBezTo>
+                  <a:pt x="4243134" y="6162"/>
+                  <a:pt x="4243492" y="11775"/>
+                  <a:pt x="4243589" y="18288"/>
+                </a:cubicBezTo>
+                <a:cubicBezTo>
+                  <a:pt x="4017834" y="-5779"/>
+                  <a:pt x="3834586" y="13376"/>
+                  <a:pt x="3594926" y="18288"/>
+                </a:cubicBezTo>
+                <a:cubicBezTo>
+                  <a:pt x="3355266" y="23200"/>
+                  <a:pt x="3204179" y="2869"/>
+                  <a:pt x="2903827" y="18288"/>
+                </a:cubicBezTo>
+                <a:cubicBezTo>
+                  <a:pt x="2603475" y="33707"/>
+                  <a:pt x="2526187" y="46187"/>
+                  <a:pt x="2212729" y="18288"/>
+                </a:cubicBezTo>
+                <a:cubicBezTo>
+                  <a:pt x="1899271" y="-9611"/>
+                  <a:pt x="1966289" y="29692"/>
+                  <a:pt x="1733809" y="18288"/>
+                </a:cubicBezTo>
+                <a:cubicBezTo>
+                  <a:pt x="1501329" y="6884"/>
+                  <a:pt x="1343612" y="12492"/>
+                  <a:pt x="1085146" y="18288"/>
+                </a:cubicBezTo>
+                <a:cubicBezTo>
+                  <a:pt x="826680" y="24084"/>
+                  <a:pt x="778184" y="35607"/>
+                  <a:pt x="521355" y="18288"/>
+                </a:cubicBezTo>
+                <a:cubicBezTo>
+                  <a:pt x="264526" y="969"/>
+                  <a:pt x="120277" y="4268"/>
+                  <a:pt x="0" y="18288"/>
+                </a:cubicBezTo>
+                <a:cubicBezTo>
+                  <a:pt x="766" y="10800"/>
+                  <a:pt x="-457" y="8180"/>
+                  <a:pt x="0" y="0"/>
+                </a:cubicBezTo>
+                <a:close/>
+              </a:path>
+            </a:pathLst>
+          </a:custGeom>
+          <a:solidFill>
+            <a:schemeClr val="accent2"/>
+          </a:solidFill>
+          <a:ln w="41275" cap="rnd">
+            <a:solidFill>
+              <a:schemeClr val="accent2"/>
+            </a:solidFill>
+            <a:round/>
+            <a:extLst>
+              <a:ext uri="{C807C97D-BFC1-408E-A445-0C87EB9F89A2}">
+                <ask:lineSketchStyleProps xmlns:ask="http://schemas.microsoft.com/office/drawing/2018/sketchyshapes" sd="2727557108">
+                  <a:prstGeom prst="rect">
+                    <a:avLst/>
+                  </a:prstGeom>
+                  <ask:type>
+                    <ask:lineSketchFreehand/>
+                  </ask:type>
+                </ask:lineSketchStyleProps>
+              </a:ext>
+            </a:extLst>
+          </a:ln>
+        </p:spPr>
+        <p:style>
+          <a:lnRef idx="2">
+            <a:schemeClr val="accent1">
+              <a:shade val="50000"/>
+            </a:schemeClr>
+          </a:lnRef>
+          <a:fillRef idx="1">
+            <a:schemeClr val="accent1"/>
+          </a:fillRef>
+          <a:effectRef idx="0">
+            <a:schemeClr val="accent1"/>
+          </a:effectRef>
+          <a:fontRef idx="minor">
+            <a:schemeClr val="lt1"/>
+          </a:fontRef>
+        </p:style>
+        <p:txBody>
+          <a:bodyPr rtlCol="0" anchor="ctr"/>
+          <a:lstStyle/>
+          <a:p>
+            <a:pPr algn="ctr"/>
+            <a:endParaRPr lang="en-US"/>
+          </a:p>
+        </p:txBody>
+      </p:sp>
+      <p:sp>
+        <p:nvSpPr>
+          <p:cNvPr id="3" name="Tijdelijke aanduiding voor inhoud 2">
+            <a:extLst>
+              <a:ext uri="{FF2B5EF4-FFF2-40B4-BE49-F238E27FC236}">
+                <a16:creationId xmlns:a16="http://schemas.microsoft.com/office/drawing/2014/main" id="{C1706C4A-E2CE-9073-7319-CEA46C953C84}"/>
+              </a:ext>
+            </a:extLst>
+          </p:cNvPr>
+          <p:cNvSpPr>
+            <a:spLocks noGrp="1"/>
+          </p:cNvSpPr>
+          <p:nvPr>
+            <p:ph idx="1"/>
+          </p:nvPr>
+        </p:nvSpPr>
+        <p:spPr>
+          <a:xfrm>
+            <a:off x="640080" y="2706624"/>
+            <a:ext cx="6894576" cy="3483864"/>
+          </a:xfrm>
+        </p:spPr>
+        <p:txBody>
+          <a:bodyPr>
+            <a:normAutofit/>
+          </a:bodyPr>
+          <a:lstStyle/>
+          <a:p>
+            <a:r>
+              <a:rPr lang="en-US" sz="2200"/>
+              <a:t>Yahtzee</a:t>
+            </a:r>
+          </a:p>
+          <a:p>
+            <a:r>
+              <a:rPr lang="en-US" sz="2200"/>
+              <a:t>Doel</a:t>
+            </a:r>
+          </a:p>
+        </p:txBody>
+      </p:sp>
+      <p:pic>
+        <p:nvPicPr>
+          <p:cNvPr id="7" name="Afbeelding 6" descr="Yahtzee">
+            <a:extLst>
+              <a:ext uri="{FF2B5EF4-FFF2-40B4-BE49-F238E27FC236}">
+                <a16:creationId xmlns:a16="http://schemas.microsoft.com/office/drawing/2014/main" id="{8A6314F1-9D5D-57DE-2AE5-A69A84E52362}"/>
+              </a:ext>
+            </a:extLst>
+          </p:cNvPr>
+          <p:cNvPicPr>
+            <a:picLocks noChangeAspect="1"/>
+          </p:cNvPicPr>
+          <p:nvPr/>
+        </p:nvPicPr>
+        <p:blipFill>
+          <a:blip r:embed="rId2"/>
+          <a:stretch>
+            <a:fillRect/>
+          </a:stretch>
+        </p:blipFill>
+        <p:spPr>
+          <a:xfrm>
+            <a:off x="8593285" y="329183"/>
+            <a:ext cx="2555326" cy="3429969"/>
+          </a:xfrm>
+          <a:prstGeom prst="rect">
+            <a:avLst/>
+          </a:prstGeom>
+        </p:spPr>
+      </p:pic>
+      <p:pic>
+        <p:nvPicPr>
+          <p:cNvPr id="5" name="Afbeelding 4" descr="Twee zwevende dobbelstenen">
+            <a:extLst>
+              <a:ext uri="{FF2B5EF4-FFF2-40B4-BE49-F238E27FC236}">
+                <a16:creationId xmlns:a16="http://schemas.microsoft.com/office/drawing/2014/main" id="{F96CD3E4-FDDA-EF19-150D-7CF2CAD3303E}"/>
+              </a:ext>
+            </a:extLst>
+          </p:cNvPr>
+          <p:cNvPicPr>
+            <a:picLocks noChangeAspect="1"/>
+          </p:cNvPicPr>
+          <p:nvPr/>
+        </p:nvPicPr>
+        <p:blipFill>
+          <a:blip r:embed="rId3">
+            <a:extLst>
+              <a:ext uri="{28A0092B-C50C-407E-A947-70E740481C1C}">
+                <a14:useLocalDpi xmlns:a14="http://schemas.microsoft.com/office/drawing/2010/main" val="0"/>
+              </a:ext>
+            </a:extLst>
+          </a:blip>
+          <a:srcRect b="10544"/>
+          <a:stretch>
+            <a:fillRect/>
+          </a:stretch>
+        </p:blipFill>
+        <p:spPr>
+          <a:xfrm>
+            <a:off x="8645411" y="4079193"/>
+            <a:ext cx="2432785" cy="2176272"/>
+          </a:xfrm>
+          <a:prstGeom prst="rect">
+            <a:avLst/>
+          </a:prstGeom>
+        </p:spPr>
+      </p:pic>
+    </p:spTree>
+    <p:extLst>
+      <p:ext uri="{BB962C8B-B14F-4D97-AF65-F5344CB8AC3E}">
+        <p14:creationId xmlns:p14="http://schemas.microsoft.com/office/powerpoint/2010/main" val="335413826"/>
+      </p:ext>
+    </p:extLst>
+  </p:cSld>
+  <p:clrMapOvr>
+    <a:masterClrMapping/>
+  </p:clrMapOvr>
+</p:sld>
+</file>
+
+<file path=ppt/slides/slide3.xml><?xml version="1.0" encoding="utf-8"?>
+<p:sld xmlns:a="http://schemas.openxmlformats.org/drawingml/2006/main" xmlns:r="http://schemas.openxmlformats.org/officeDocument/2006/relationships" xmlns:p="http://schemas.openxmlformats.org/presentationml/2006/main">
+  <p:cSld>
+    <p:bg>
+      <p:bgPr>
+        <a:solidFill>
+          <a:schemeClr val="bg1"/>
+        </a:solidFill>
+        <a:effectLst/>
+      </p:bgPr>
+    </p:bg>
+    <p:spTree>
+      <p:nvGrpSpPr>
+        <p:cNvPr id="1" name=""/>
+        <p:cNvGrpSpPr/>
+        <p:nvPr/>
+      </p:nvGrpSpPr>
+      <p:grpSpPr>
+        <a:xfrm>
+          <a:off x="0" y="0"/>
+          <a:ext cx="0" cy="0"/>
+          <a:chOff x="0" y="0"/>
+          <a:chExt cx="0" cy="0"/>
+        </a:xfrm>
+      </p:grpSpPr>
+      <p:sp useBgFill="1">
+        <p:nvSpPr>
+          <p:cNvPr id="9" name="Rectangle 8">
+            <a:extLst>
+              <a:ext uri="{FF2B5EF4-FFF2-40B4-BE49-F238E27FC236}">
+                <a16:creationId xmlns:a16="http://schemas.microsoft.com/office/drawing/2014/main" id="{F13C74B1-5B17-4795-BED0-7140497B445A}"/>
+              </a:ext>
+              <a:ext uri="{C183D7F6-B498-43B3-948B-1728B52AA6E4}">
+                <adec:decorative xmlns:adec="http://schemas.microsoft.com/office/drawing/2017/decorative" val="1"/>
+              </a:ext>
+            </a:extLst>
+          </p:cNvPr>
+          <p:cNvSpPr>
+            <a:spLocks noGrp="1" noRot="1" noChangeAspect="1" noMove="1" noResize="1" noEditPoints="1" noAdjustHandles="1" noChangeArrowheads="1" noChangeShapeType="1" noTextEdit="1"/>
+          </p:cNvSpPr>
+          <p:nvPr>
+            <p:extLst>
+              <p:ext uri="{386F3935-93C4-4BCD-93E2-E3B085C9AB24}">
+                <p16:designElem xmlns:p16="http://schemas.microsoft.com/office/powerpoint/2015/main" val="1"/>
+              </p:ext>
+            </p:extLst>
+          </p:nvPr>
+        </p:nvSpPr>
+        <p:spPr>
+          <a:xfrm>
+            <a:off x="0" y="0"/>
+            <a:ext cx="12188952" cy="6858000"/>
+          </a:xfrm>
+          <a:prstGeom prst="rect">
+            <a:avLst/>
+          </a:prstGeom>
+          <a:ln>
+            <a:noFill/>
+          </a:ln>
+        </p:spPr>
+        <p:style>
+          <a:lnRef idx="2">
+            <a:schemeClr val="accent1">
+              <a:shade val="50000"/>
+            </a:schemeClr>
+          </a:lnRef>
+          <a:fillRef idx="1">
+            <a:schemeClr val="accent1"/>
+          </a:fillRef>
+          <a:effectRef idx="0">
+            <a:schemeClr val="accent1"/>
+          </a:effectRef>
+          <a:fontRef idx="minor">
+            <a:schemeClr val="lt1"/>
+          </a:fontRef>
+        </p:style>
+        <p:txBody>
+          <a:bodyPr rtlCol="0" anchor="ctr"/>
+          <a:lstStyle/>
+          <a:p>
+            <a:pPr algn="ctr"/>
+            <a:endParaRPr lang="en-US"/>
+          </a:p>
+        </p:txBody>
+      </p:sp>
+      <p:sp>
+        <p:nvSpPr>
+          <p:cNvPr id="2" name="Titel 1">
+            <a:extLst>
+              <a:ext uri="{FF2B5EF4-FFF2-40B4-BE49-F238E27FC236}">
+                <a16:creationId xmlns:a16="http://schemas.microsoft.com/office/drawing/2014/main" id="{62578E7B-DC14-F3AA-1802-DBCAF15D6E4F}"/>
+              </a:ext>
+            </a:extLst>
+          </p:cNvPr>
+          <p:cNvSpPr>
+            <a:spLocks noGrp="1"/>
+          </p:cNvSpPr>
+          <p:nvPr>
+            <p:ph type="title"/>
+          </p:nvPr>
+        </p:nvSpPr>
+        <p:spPr>
+          <a:xfrm>
+            <a:off x="640080" y="325369"/>
+            <a:ext cx="4368602" cy="1956841"/>
+          </a:xfrm>
+        </p:spPr>
+        <p:txBody>
+          <a:bodyPr anchor="b">
+            <a:normAutofit/>
+          </a:bodyPr>
+          <a:lstStyle/>
+          <a:p>
+            <a:r>
+              <a:rPr lang="en-US" sz="5400" b="1"/>
+              <a:t>PROJECT KEUZE</a:t>
+            </a:r>
+            <a:endParaRPr lang="nl-NL" sz="5400" b="1"/>
+          </a:p>
+        </p:txBody>
+      </p:sp>
+      <p:sp>
+        <p:nvSpPr>
+          <p:cNvPr id="11" name="sketchy line">
+            <a:extLst>
+              <a:ext uri="{FF2B5EF4-FFF2-40B4-BE49-F238E27FC236}">
+                <a16:creationId xmlns:a16="http://schemas.microsoft.com/office/drawing/2014/main" id="{D4974D33-8DC5-464E-8C6D-BE58F0669C17}"/>
+              </a:ext>
+              <a:ext uri="{C183D7F6-B498-43B3-948B-1728B52AA6E4}">
+                <adec:decorative xmlns:adec="http://schemas.microsoft.com/office/drawing/2017/decorative" val="1"/>
+              </a:ext>
+            </a:extLst>
+          </p:cNvPr>
+          <p:cNvSpPr>
+            <a:spLocks noGrp="1" noRot="1" noChangeAspect="1" noMove="1" noResize="1" noEditPoints="1" noAdjustHandles="1" noChangeArrowheads="1" noChangeShapeType="1" noTextEdit="1"/>
+          </p:cNvSpPr>
+          <p:nvPr>
+            <p:extLst>
+              <p:ext uri="{386F3935-93C4-4BCD-93E2-E3B085C9AB24}">
+                <p16:designElem xmlns:p16="http://schemas.microsoft.com/office/powerpoint/2015/main" val="1"/>
+              </p:ext>
+            </p:extLst>
+          </p:nvPr>
+        </p:nvSpPr>
+        <p:spPr>
+          <a:xfrm>
+            <a:off x="640080" y="2586994"/>
+            <a:ext cx="3474720" cy="18288"/>
+          </a:xfrm>
+          <a:custGeom>
+            <a:avLst/>
+            <a:gdLst>
+              <a:gd name="csX0" fmla="*/ 0 w 3474720"/>
+              <a:gd name="csY0" fmla="*/ 0 h 18288"/>
+              <a:gd name="csX1" fmla="*/ 694944 w 3474720"/>
+              <a:gd name="csY1" fmla="*/ 0 h 18288"/>
+              <a:gd name="csX2" fmla="*/ 1355141 w 3474720"/>
+              <a:gd name="csY2" fmla="*/ 0 h 18288"/>
+              <a:gd name="csX3" fmla="*/ 2015338 w 3474720"/>
+              <a:gd name="csY3" fmla="*/ 0 h 18288"/>
+              <a:gd name="csX4" fmla="*/ 2779776 w 3474720"/>
+              <a:gd name="csY4" fmla="*/ 0 h 18288"/>
+              <a:gd name="csX5" fmla="*/ 3474720 w 3474720"/>
+              <a:gd name="csY5" fmla="*/ 0 h 18288"/>
+              <a:gd name="csX6" fmla="*/ 3474720 w 3474720"/>
+              <a:gd name="csY6" fmla="*/ 18288 h 18288"/>
+              <a:gd name="csX7" fmla="*/ 2779776 w 3474720"/>
+              <a:gd name="csY7" fmla="*/ 18288 h 18288"/>
+              <a:gd name="csX8" fmla="*/ 2189074 w 3474720"/>
+              <a:gd name="csY8" fmla="*/ 18288 h 18288"/>
+              <a:gd name="csX9" fmla="*/ 1528877 w 3474720"/>
+              <a:gd name="csY9" fmla="*/ 18288 h 18288"/>
+              <a:gd name="csX10" fmla="*/ 868680 w 3474720"/>
+              <a:gd name="csY10" fmla="*/ 18288 h 18288"/>
+              <a:gd name="csX11" fmla="*/ 0 w 3474720"/>
+              <a:gd name="csY11" fmla="*/ 18288 h 18288"/>
+              <a:gd name="csX12" fmla="*/ 0 w 3474720"/>
+              <a:gd name="csY12" fmla="*/ 0 h 18288"/>
+            </a:gdLst>
+            <a:ahLst/>
+            <a:cxnLst>
+              <a:cxn ang="0">
+                <a:pos x="csX0" y="csY0"/>
+              </a:cxn>
+              <a:cxn ang="0">
+                <a:pos x="csX1" y="csY1"/>
+              </a:cxn>
+              <a:cxn ang="0">
+                <a:pos x="csX2" y="csY2"/>
+              </a:cxn>
+              <a:cxn ang="0">
+                <a:pos x="csX3" y="csY3"/>
+              </a:cxn>
+              <a:cxn ang="0">
+                <a:pos x="csX4" y="csY4"/>
+              </a:cxn>
+              <a:cxn ang="0">
+                <a:pos x="csX5" y="csY5"/>
+              </a:cxn>
+              <a:cxn ang="0">
+                <a:pos x="csX6" y="csY6"/>
+              </a:cxn>
+              <a:cxn ang="0">
+                <a:pos x="csX7" y="csY7"/>
+              </a:cxn>
+              <a:cxn ang="0">
+                <a:pos x="csX8" y="csY8"/>
+              </a:cxn>
+              <a:cxn ang="0">
+                <a:pos x="csX9" y="csY9"/>
+              </a:cxn>
+              <a:cxn ang="0">
+                <a:pos x="csX10" y="csY10"/>
+              </a:cxn>
+              <a:cxn ang="0">
+                <a:pos x="csX11" y="csY11"/>
+              </a:cxn>
+              <a:cxn ang="0">
+                <a:pos x="csX12" y="csY12"/>
+              </a:cxn>
+            </a:cxnLst>
+            <a:rect l="l" t="t" r="r" b="b"/>
+            <a:pathLst>
+              <a:path w="3474720" h="18288" fill="none" extrusionOk="0">
+                <a:moveTo>
+                  <a:pt x="0" y="0"/>
+                </a:moveTo>
+                <a:cubicBezTo>
+                  <a:pt x="224454" y="-14544"/>
+                  <a:pt x="495407" y="26540"/>
+                  <a:pt x="694944" y="0"/>
+                </a:cubicBezTo>
+                <a:cubicBezTo>
+                  <a:pt x="894481" y="-26540"/>
+                  <a:pt x="1130063" y="24713"/>
+                  <a:pt x="1355141" y="0"/>
+                </a:cubicBezTo>
+                <a:cubicBezTo>
+                  <a:pt x="1580219" y="-24713"/>
+                  <a:pt x="1820099" y="26695"/>
+                  <a:pt x="2015338" y="0"/>
+                </a:cubicBezTo>
+                <a:cubicBezTo>
+                  <a:pt x="2210577" y="-26695"/>
+                  <a:pt x="2402045" y="165"/>
+                  <a:pt x="2779776" y="0"/>
+                </a:cubicBezTo>
+                <a:cubicBezTo>
+                  <a:pt x="3157507" y="-165"/>
+                  <a:pt x="3286859" y="-15571"/>
+                  <a:pt x="3474720" y="0"/>
+                </a:cubicBezTo>
+                <a:cubicBezTo>
+                  <a:pt x="3474286" y="7551"/>
+                  <a:pt x="3474253" y="9822"/>
+                  <a:pt x="3474720" y="18288"/>
+                </a:cubicBezTo>
+                <a:cubicBezTo>
+                  <a:pt x="3233904" y="29845"/>
+                  <a:pt x="2945134" y="-5256"/>
+                  <a:pt x="2779776" y="18288"/>
+                </a:cubicBezTo>
+                <a:cubicBezTo>
+                  <a:pt x="2614418" y="41832"/>
+                  <a:pt x="2339768" y="22709"/>
+                  <a:pt x="2189074" y="18288"/>
+                </a:cubicBezTo>
+                <a:cubicBezTo>
+                  <a:pt x="2038380" y="13867"/>
+                  <a:pt x="1817434" y="-4947"/>
+                  <a:pt x="1528877" y="18288"/>
+                </a:cubicBezTo>
+                <a:cubicBezTo>
+                  <a:pt x="1240320" y="41523"/>
+                  <a:pt x="1042447" y="37198"/>
+                  <a:pt x="868680" y="18288"/>
+                </a:cubicBezTo>
+                <a:cubicBezTo>
+                  <a:pt x="694913" y="-622"/>
+                  <a:pt x="233232" y="44909"/>
+                  <a:pt x="0" y="18288"/>
+                </a:cubicBezTo>
+                <a:cubicBezTo>
+                  <a:pt x="60" y="11696"/>
+                  <a:pt x="66" y="3758"/>
+                  <a:pt x="0" y="0"/>
+                </a:cubicBezTo>
+                <a:close/>
+              </a:path>
+              <a:path w="3474720" h="18288" stroke="0" extrusionOk="0">
+                <a:moveTo>
+                  <a:pt x="0" y="0"/>
+                </a:moveTo>
+                <a:cubicBezTo>
+                  <a:pt x="202328" y="-14716"/>
+                  <a:pt x="332722" y="-11499"/>
+                  <a:pt x="625450" y="0"/>
+                </a:cubicBezTo>
+                <a:cubicBezTo>
+                  <a:pt x="918178" y="11499"/>
+                  <a:pt x="1096688" y="5123"/>
+                  <a:pt x="1389888" y="0"/>
+                </a:cubicBezTo>
+                <a:cubicBezTo>
+                  <a:pt x="1683088" y="-5123"/>
+                  <a:pt x="1835981" y="-14038"/>
+                  <a:pt x="1980590" y="0"/>
+                </a:cubicBezTo>
+                <a:cubicBezTo>
+                  <a:pt x="2125199" y="14038"/>
+                  <a:pt x="2396099" y="-7203"/>
+                  <a:pt x="2571293" y="0"/>
+                </a:cubicBezTo>
+                <a:cubicBezTo>
+                  <a:pt x="2746487" y="7203"/>
+                  <a:pt x="3041609" y="-12036"/>
+                  <a:pt x="3474720" y="0"/>
+                </a:cubicBezTo>
+                <a:cubicBezTo>
+                  <a:pt x="3474638" y="4406"/>
+                  <a:pt x="3474631" y="9982"/>
+                  <a:pt x="3474720" y="18288"/>
+                </a:cubicBezTo>
+                <a:cubicBezTo>
+                  <a:pt x="3324873" y="21876"/>
+                  <a:pt x="3136771" y="12587"/>
+                  <a:pt x="2814523" y="18288"/>
+                </a:cubicBezTo>
+                <a:cubicBezTo>
+                  <a:pt x="2492275" y="23989"/>
+                  <a:pt x="2294402" y="47111"/>
+                  <a:pt x="2154326" y="18288"/>
+                </a:cubicBezTo>
+                <a:cubicBezTo>
+                  <a:pt x="2014250" y="-10535"/>
+                  <a:pt x="1820317" y="33903"/>
+                  <a:pt x="1494130" y="18288"/>
+                </a:cubicBezTo>
+                <a:cubicBezTo>
+                  <a:pt x="1167943" y="2673"/>
+                  <a:pt x="948432" y="14868"/>
+                  <a:pt x="729691" y="18288"/>
+                </a:cubicBezTo>
+                <a:cubicBezTo>
+                  <a:pt x="510950" y="21708"/>
+                  <a:pt x="264032" y="24354"/>
+                  <a:pt x="0" y="18288"/>
+                </a:cubicBezTo>
+                <a:cubicBezTo>
+                  <a:pt x="189" y="14288"/>
+                  <a:pt x="-703" y="3747"/>
+                  <a:pt x="0" y="0"/>
+                </a:cubicBezTo>
+                <a:close/>
+              </a:path>
+            </a:pathLst>
+          </a:custGeom>
+          <a:solidFill>
+            <a:schemeClr val="accent2"/>
+          </a:solidFill>
+          <a:ln w="44450" cap="rnd">
+            <a:solidFill>
+              <a:schemeClr val="accent2"/>
+            </a:solidFill>
+            <a:round/>
+            <a:extLst>
+              <a:ext uri="{C807C97D-BFC1-408E-A445-0C87EB9F89A2}">
+                <ask:lineSketchStyleProps xmlns:ask="http://schemas.microsoft.com/office/drawing/2018/sketchyshapes" sd="2863741219">
+                  <a:prstGeom prst="rect">
+                    <a:avLst/>
+                  </a:prstGeom>
+                  <ask:type>
+                    <ask:lineSketchFreehand/>
+                  </ask:type>
+                </ask:lineSketchStyleProps>
+              </a:ext>
+            </a:extLst>
+          </a:ln>
+        </p:spPr>
+        <p:style>
+          <a:lnRef idx="2">
+            <a:schemeClr val="accent1">
+              <a:shade val="50000"/>
+            </a:schemeClr>
+          </a:lnRef>
+          <a:fillRef idx="1">
+            <a:schemeClr val="accent1"/>
+          </a:fillRef>
+          <a:effectRef idx="0">
+            <a:schemeClr val="accent1"/>
+          </a:effectRef>
+          <a:fontRef idx="minor">
+            <a:schemeClr val="lt1"/>
+          </a:fontRef>
+        </p:style>
+        <p:txBody>
+          <a:bodyPr rtlCol="0" anchor="ctr"/>
+          <a:lstStyle/>
+          <a:p>
+            <a:pPr algn="ctr"/>
+            <a:endParaRPr lang="en-US"/>
+          </a:p>
+        </p:txBody>
+      </p:sp>
+      <p:sp>
+        <p:nvSpPr>
+          <p:cNvPr id="3" name="Tijdelijke aanduiding voor inhoud 2">
+            <a:extLst>
+              <a:ext uri="{FF2B5EF4-FFF2-40B4-BE49-F238E27FC236}">
+                <a16:creationId xmlns:a16="http://schemas.microsoft.com/office/drawing/2014/main" id="{FA737FDD-F145-64D8-2CB3-8FB92C91EDC9}"/>
+              </a:ext>
+            </a:extLst>
+          </p:cNvPr>
+          <p:cNvSpPr>
+            <a:spLocks noGrp="1"/>
+          </p:cNvSpPr>
+          <p:nvPr>
+            <p:ph idx="1"/>
+          </p:nvPr>
+        </p:nvSpPr>
+        <p:spPr>
+          <a:xfrm>
+            <a:off x="640080" y="2872899"/>
+            <a:ext cx="4243589" cy="3320668"/>
+          </a:xfrm>
+        </p:spPr>
+        <p:txBody>
+          <a:bodyPr>
+            <a:normAutofit/>
+          </a:bodyPr>
+          <a:lstStyle/>
+          <a:p>
+            <a:r>
+              <a:rPr lang="en-US" sz="2200">
+                <a:latin typeface="Arial Nova" panose="020B0504020202020204" pitchFamily="34" charset="0"/>
+              </a:rPr>
+              <a:t>Yathzee</a:t>
+            </a:r>
+          </a:p>
+          <a:p>
+            <a:r>
+              <a:rPr lang="en-US" sz="2200">
+                <a:latin typeface="Arial Nova" panose="020B0504020202020204" pitchFamily="34" charset="0"/>
+              </a:rPr>
+              <a:t>UNO AI, Lingo, Dobbel Trobbel</a:t>
+            </a:r>
+          </a:p>
+          <a:p>
+            <a:r>
+              <a:rPr lang="en-US" sz="2200">
+                <a:latin typeface="Arial Nova" panose="020B0504020202020204" pitchFamily="34" charset="0"/>
+              </a:rPr>
+              <a:t>Waarom Yathzee</a:t>
+            </a:r>
+          </a:p>
+          <a:p>
+            <a:r>
+              <a:rPr lang="en-US" sz="2200">
+                <a:latin typeface="Arial Nova" panose="020B0504020202020204" pitchFamily="34" charset="0"/>
+              </a:rPr>
+              <a:t>Wat heb ik geleert</a:t>
+            </a:r>
+          </a:p>
+          <a:p>
+            <a:pPr>
+              <a:buFontTx/>
+              <a:buChar char="-"/>
+            </a:pPr>
+            <a:endParaRPr lang="nl-NL" sz="2200"/>
+          </a:p>
+        </p:txBody>
+      </p:sp>
+      <p:pic>
+        <p:nvPicPr>
+          <p:cNvPr id="4" name="Afbeelding 3" descr="How to Play Yahtzee: Scoring, Rolls, Dice Combinations">
+            <a:extLst>
+              <a:ext uri="{FF2B5EF4-FFF2-40B4-BE49-F238E27FC236}">
+                <a16:creationId xmlns:a16="http://schemas.microsoft.com/office/drawing/2014/main" id="{8651CCA5-15B3-B149-D8F5-D22FCE8948F2}"/>
+              </a:ext>
+            </a:extLst>
+          </p:cNvPr>
+          <p:cNvPicPr>
+            <a:picLocks noChangeAspect="1"/>
+          </p:cNvPicPr>
+          <p:nvPr/>
+        </p:nvPicPr>
+        <p:blipFill>
+          <a:blip r:embed="rId2"/>
+          <a:srcRect l="11326" r="13447"/>
+          <a:stretch>
+            <a:fillRect/>
+          </a:stretch>
+        </p:blipFill>
+        <p:spPr>
+          <a:xfrm>
+            <a:off x="5311702" y="10"/>
+            <a:ext cx="6878775" cy="6857990"/>
+          </a:xfrm>
+          <a:custGeom>
+            <a:avLst/>
+            <a:gdLst/>
+            <a:ahLst/>
+            <a:cxnLst/>
+            <a:rect l="l" t="t" r="r" b="b"/>
+            <a:pathLst>
+              <a:path w="6878775" h="6858000">
+                <a:moveTo>
+                  <a:pt x="1102973" y="0"/>
+                </a:moveTo>
+                <a:lnTo>
+                  <a:pt x="1160688" y="0"/>
+                </a:lnTo>
+                <a:lnTo>
+                  <a:pt x="983189" y="331786"/>
+                </a:lnTo>
+                <a:cubicBezTo>
+                  <a:pt x="914866" y="469145"/>
+                  <a:pt x="850355" y="608712"/>
+                  <a:pt x="789261" y="750263"/>
+                </a:cubicBezTo>
+                <a:cubicBezTo>
+                  <a:pt x="774307" y="784928"/>
+                  <a:pt x="759992" y="819849"/>
+                  <a:pt x="745295" y="854514"/>
+                </a:cubicBezTo>
+                <a:cubicBezTo>
+                  <a:pt x="756682" y="845393"/>
+                  <a:pt x="765489" y="833492"/>
+                  <a:pt x="770857" y="819975"/>
+                </a:cubicBezTo>
+                <a:cubicBezTo>
+                  <a:pt x="879943" y="589569"/>
+                  <a:pt x="999605" y="365513"/>
+                  <a:pt x="1131329" y="148742"/>
+                </a:cubicBezTo>
+                <a:lnTo>
+                  <a:pt x="1227589" y="0"/>
+                </a:lnTo>
+                <a:lnTo>
+                  <a:pt x="6878775" y="0"/>
+                </a:lnTo>
+                <a:lnTo>
+                  <a:pt x="6878775" y="6858000"/>
+                </a:lnTo>
+                <a:lnTo>
+                  <a:pt x="713521" y="6858000"/>
+                </a:lnTo>
+                <a:lnTo>
+                  <a:pt x="625642" y="6670527"/>
+                </a:lnTo>
+                <a:cubicBezTo>
+                  <a:pt x="507232" y="6398531"/>
+                  <a:pt x="403083" y="6118381"/>
+                  <a:pt x="312785" y="5830359"/>
+                </a:cubicBezTo>
+                <a:cubicBezTo>
+                  <a:pt x="278149" y="5719759"/>
+                  <a:pt x="248879" y="5607635"/>
+                  <a:pt x="212198" y="5480401"/>
+                </a:cubicBezTo>
+                <a:cubicBezTo>
+                  <a:pt x="212208" y="5491601"/>
+                  <a:pt x="212803" y="5502788"/>
+                  <a:pt x="213988" y="5513923"/>
+                </a:cubicBezTo>
+                <a:cubicBezTo>
+                  <a:pt x="264089" y="5723695"/>
+                  <a:pt x="307290" y="5935370"/>
+                  <a:pt x="365826" y="6142729"/>
+                </a:cubicBezTo>
+                <a:cubicBezTo>
+                  <a:pt x="433152" y="6380817"/>
+                  <a:pt x="510068" y="6614016"/>
+                  <a:pt x="597975" y="6841549"/>
+                </a:cubicBezTo>
+                <a:lnTo>
+                  <a:pt x="604824" y="6858000"/>
+                </a:lnTo>
+                <a:lnTo>
+                  <a:pt x="552056" y="6858000"/>
+                </a:lnTo>
+                <a:lnTo>
+                  <a:pt x="539576" y="6828295"/>
+                </a:lnTo>
+                <a:cubicBezTo>
+                  <a:pt x="380597" y="6414594"/>
+                  <a:pt x="260223" y="5988893"/>
+                  <a:pt x="171555" y="5552906"/>
+                </a:cubicBezTo>
+                <a:cubicBezTo>
+                  <a:pt x="91163" y="5157998"/>
+                  <a:pt x="43746" y="4758899"/>
+                  <a:pt x="12305" y="4357388"/>
+                </a:cubicBezTo>
+                <a:cubicBezTo>
+                  <a:pt x="-14281" y="4013908"/>
+                  <a:pt x="4507" y="3672965"/>
+                  <a:pt x="46684" y="3331516"/>
+                </a:cubicBezTo>
+                <a:cubicBezTo>
+                  <a:pt x="127203" y="2664286"/>
+                  <a:pt x="277819" y="2007265"/>
+                  <a:pt x="496065" y="1371196"/>
+                </a:cubicBezTo>
+                <a:cubicBezTo>
+                  <a:pt x="636273" y="966066"/>
+                  <a:pt x="800445" y="573253"/>
+                  <a:pt x="995723" y="196614"/>
+                </a:cubicBezTo>
+                <a:close/>
+              </a:path>
+            </a:pathLst>
+          </a:custGeom>
+        </p:spPr>
+      </p:pic>
+    </p:spTree>
+    <p:extLst>
+      <p:ext uri="{BB962C8B-B14F-4D97-AF65-F5344CB8AC3E}">
+        <p14:creationId xmlns:p14="http://schemas.microsoft.com/office/powerpoint/2010/main" val="1434611034"/>
+      </p:ext>
+    </p:extLst>
+  </p:cSld>
+  <p:clrMapOvr>
+    <a:masterClrMapping/>
+  </p:clrMapOvr>
+</p:sld>
+</file>
+
+<file path=ppt/slides/slide4.xml><?xml version="1.0" encoding="utf-8"?>
+<p:sld xmlns:a="http://schemas.openxmlformats.org/drawingml/2006/main" xmlns:r="http://schemas.openxmlformats.org/officeDocument/2006/relationships" xmlns:p="http://schemas.openxmlformats.org/presentationml/2006/main">
+  <p:cSld>
+    <p:bg>
+      <p:bgPr>
+        <a:solidFill>
+          <a:schemeClr val="bg1"/>
+        </a:solidFill>
+        <a:effectLst/>
+      </p:bgPr>
+    </p:bg>
+    <p:spTree>
+      <p:nvGrpSpPr>
+        <p:cNvPr id="1" name=""/>
+        <p:cNvGrpSpPr/>
+        <p:nvPr/>
+      </p:nvGrpSpPr>
+      <p:grpSpPr>
+        <a:xfrm>
+          <a:off x="0" y="0"/>
+          <a:ext cx="0" cy="0"/>
+          <a:chOff x="0" y="0"/>
+          <a:chExt cx="0" cy="0"/>
+        </a:xfrm>
+      </p:grpSpPr>
+      <p:sp useBgFill="1">
+        <p:nvSpPr>
+          <p:cNvPr id="10" name="Rectangle 9">
+            <a:extLst>
+              <a:ext uri="{FF2B5EF4-FFF2-40B4-BE49-F238E27FC236}">
+                <a16:creationId xmlns:a16="http://schemas.microsoft.com/office/drawing/2014/main" id="{F13C74B1-5B17-4795-BED0-7140497B445A}"/>
+              </a:ext>
+              <a:ext uri="{C183D7F6-B498-43B3-948B-1728B52AA6E4}">
+                <adec:decorative xmlns:adec="http://schemas.microsoft.com/office/drawing/2017/decorative" val="1"/>
+              </a:ext>
+            </a:extLst>
+          </p:cNvPr>
+          <p:cNvSpPr>
+            <a:spLocks noGrp="1" noRot="1" noChangeAspect="1" noMove="1" noResize="1" noEditPoints="1" noAdjustHandles="1" noChangeArrowheads="1" noChangeShapeType="1" noTextEdit="1"/>
+          </p:cNvSpPr>
+          <p:nvPr>
+            <p:extLst>
+              <p:ext uri="{386F3935-93C4-4BCD-93E2-E3B085C9AB24}">
+                <p16:designElem xmlns:p16="http://schemas.microsoft.com/office/powerpoint/2015/main" val="1"/>
+              </p:ext>
+            </p:extLst>
+          </p:nvPr>
+        </p:nvSpPr>
+        <p:spPr>
+          <a:xfrm>
+            <a:off x="0" y="0"/>
+            <a:ext cx="12188952" cy="6858000"/>
+          </a:xfrm>
+          <a:prstGeom prst="rect">
+            <a:avLst/>
+          </a:prstGeom>
+          <a:ln>
+            <a:noFill/>
+          </a:ln>
+        </p:spPr>
+        <p:style>
+          <a:lnRef idx="2">
+            <a:schemeClr val="accent1">
+              <a:shade val="50000"/>
+            </a:schemeClr>
+          </a:lnRef>
+          <a:fillRef idx="1">
+            <a:schemeClr val="accent1"/>
+          </a:fillRef>
+          <a:effectRef idx="0">
+            <a:schemeClr val="accent1"/>
+          </a:effectRef>
+          <a:fontRef idx="minor">
+            <a:schemeClr val="lt1"/>
+          </a:fontRef>
+        </p:style>
+        <p:txBody>
+          <a:bodyPr rtlCol="0" anchor="ctr"/>
+          <a:lstStyle/>
+          <a:p>
+            <a:pPr algn="ctr"/>
+            <a:endParaRPr lang="en-US"/>
+          </a:p>
+        </p:txBody>
+      </p:sp>
+      <p:sp>
+        <p:nvSpPr>
+          <p:cNvPr id="2" name="Titel 1">
+            <a:extLst>
+              <a:ext uri="{FF2B5EF4-FFF2-40B4-BE49-F238E27FC236}">
+                <a16:creationId xmlns:a16="http://schemas.microsoft.com/office/drawing/2014/main" id="{76B64745-5364-1418-10F4-DD8A62AA1625}"/>
+              </a:ext>
+            </a:extLst>
+          </p:cNvPr>
+          <p:cNvSpPr>
+            <a:spLocks noGrp="1"/>
+          </p:cNvSpPr>
+          <p:nvPr>
+            <p:ph type="title"/>
+          </p:nvPr>
+        </p:nvSpPr>
+        <p:spPr>
+          <a:xfrm>
+            <a:off x="640080" y="325369"/>
+            <a:ext cx="4368602" cy="1956841"/>
+          </a:xfrm>
+        </p:spPr>
+        <p:txBody>
+          <a:bodyPr anchor="b">
+            <a:normAutofit/>
+          </a:bodyPr>
+          <a:lstStyle/>
+          <a:p>
+            <a:r>
+              <a:rPr lang="en-US" sz="4200" b="1"/>
+              <a:t>PROJECT VOORBEREIDING</a:t>
+            </a:r>
+            <a:endParaRPr lang="nl-NL" sz="4200" b="1"/>
+          </a:p>
+        </p:txBody>
+      </p:sp>
+      <p:sp>
+        <p:nvSpPr>
+          <p:cNvPr id="12" name="sketchy line">
+            <a:extLst>
+              <a:ext uri="{FF2B5EF4-FFF2-40B4-BE49-F238E27FC236}">
+                <a16:creationId xmlns:a16="http://schemas.microsoft.com/office/drawing/2014/main" id="{D4974D33-8DC5-464E-8C6D-BE58F0669C17}"/>
+              </a:ext>
+              <a:ext uri="{C183D7F6-B498-43B3-948B-1728B52AA6E4}">
+                <adec:decorative xmlns:adec="http://schemas.microsoft.com/office/drawing/2017/decorative" val="1"/>
+              </a:ext>
+            </a:extLst>
+          </p:cNvPr>
+          <p:cNvSpPr>
+            <a:spLocks noGrp="1" noRot="1" noChangeAspect="1" noMove="1" noResize="1" noEditPoints="1" noAdjustHandles="1" noChangeArrowheads="1" noChangeShapeType="1" noTextEdit="1"/>
+          </p:cNvSpPr>
+          <p:nvPr>
+            <p:extLst>
+              <p:ext uri="{386F3935-93C4-4BCD-93E2-E3B085C9AB24}">
+                <p16:designElem xmlns:p16="http://schemas.microsoft.com/office/powerpoint/2015/main" val="1"/>
+              </p:ext>
+            </p:extLst>
+          </p:nvPr>
+        </p:nvSpPr>
+        <p:spPr>
+          <a:xfrm>
+            <a:off x="640080" y="2586994"/>
+            <a:ext cx="3474720" cy="18288"/>
+          </a:xfrm>
+          <a:custGeom>
+            <a:avLst/>
+            <a:gdLst>
+              <a:gd name="csX0" fmla="*/ 0 w 3474720"/>
+              <a:gd name="csY0" fmla="*/ 0 h 18288"/>
+              <a:gd name="csX1" fmla="*/ 694944 w 3474720"/>
+              <a:gd name="csY1" fmla="*/ 0 h 18288"/>
+              <a:gd name="csX2" fmla="*/ 1355141 w 3474720"/>
+              <a:gd name="csY2" fmla="*/ 0 h 18288"/>
+              <a:gd name="csX3" fmla="*/ 2015338 w 3474720"/>
+              <a:gd name="csY3" fmla="*/ 0 h 18288"/>
+              <a:gd name="csX4" fmla="*/ 2779776 w 3474720"/>
+              <a:gd name="csY4" fmla="*/ 0 h 18288"/>
+              <a:gd name="csX5" fmla="*/ 3474720 w 3474720"/>
+              <a:gd name="csY5" fmla="*/ 0 h 18288"/>
+              <a:gd name="csX6" fmla="*/ 3474720 w 3474720"/>
+              <a:gd name="csY6" fmla="*/ 18288 h 18288"/>
+              <a:gd name="csX7" fmla="*/ 2779776 w 3474720"/>
+              <a:gd name="csY7" fmla="*/ 18288 h 18288"/>
+              <a:gd name="csX8" fmla="*/ 2189074 w 3474720"/>
+              <a:gd name="csY8" fmla="*/ 18288 h 18288"/>
+              <a:gd name="csX9" fmla="*/ 1528877 w 3474720"/>
+              <a:gd name="csY9" fmla="*/ 18288 h 18288"/>
+              <a:gd name="csX10" fmla="*/ 868680 w 3474720"/>
+              <a:gd name="csY10" fmla="*/ 18288 h 18288"/>
+              <a:gd name="csX11" fmla="*/ 0 w 3474720"/>
+              <a:gd name="csY11" fmla="*/ 18288 h 18288"/>
+              <a:gd name="csX12" fmla="*/ 0 w 3474720"/>
+              <a:gd name="csY12" fmla="*/ 0 h 18288"/>
+            </a:gdLst>
+            <a:ahLst/>
+            <a:cxnLst>
+              <a:cxn ang="0">
+                <a:pos x="csX0" y="csY0"/>
+              </a:cxn>
+              <a:cxn ang="0">
+                <a:pos x="csX1" y="csY1"/>
+              </a:cxn>
+              <a:cxn ang="0">
+                <a:pos x="csX2" y="csY2"/>
+              </a:cxn>
+              <a:cxn ang="0">
+                <a:pos x="csX3" y="csY3"/>
+              </a:cxn>
+              <a:cxn ang="0">
+                <a:pos x="csX4" y="csY4"/>
+              </a:cxn>
+              <a:cxn ang="0">
+                <a:pos x="csX5" y="csY5"/>
+              </a:cxn>
+              <a:cxn ang="0">
+                <a:pos x="csX6" y="csY6"/>
+              </a:cxn>
+              <a:cxn ang="0">
+                <a:pos x="csX7" y="csY7"/>
+              </a:cxn>
+              <a:cxn ang="0">
+                <a:pos x="csX8" y="csY8"/>
+              </a:cxn>
+              <a:cxn ang="0">
+                <a:pos x="csX9" y="csY9"/>
+              </a:cxn>
+              <a:cxn ang="0">
+                <a:pos x="csX10" y="csY10"/>
+              </a:cxn>
+              <a:cxn ang="0">
+                <a:pos x="csX11" y="csY11"/>
+              </a:cxn>
+              <a:cxn ang="0">
+                <a:pos x="csX12" y="csY12"/>
+              </a:cxn>
+            </a:cxnLst>
+            <a:rect l="l" t="t" r="r" b="b"/>
+            <a:pathLst>
+              <a:path w="3474720" h="18288" fill="none" extrusionOk="0">
+                <a:moveTo>
+                  <a:pt x="0" y="0"/>
+                </a:moveTo>
+                <a:cubicBezTo>
+                  <a:pt x="224454" y="-14544"/>
+                  <a:pt x="495407" y="26540"/>
+                  <a:pt x="694944" y="0"/>
+                </a:cubicBezTo>
+                <a:cubicBezTo>
+                  <a:pt x="894481" y="-26540"/>
+                  <a:pt x="1130063" y="24713"/>
+                  <a:pt x="1355141" y="0"/>
+                </a:cubicBezTo>
+                <a:cubicBezTo>
+                  <a:pt x="1580219" y="-24713"/>
+                  <a:pt x="1820099" y="26695"/>
+                  <a:pt x="2015338" y="0"/>
+                </a:cubicBezTo>
+                <a:cubicBezTo>
+                  <a:pt x="2210577" y="-26695"/>
+                  <a:pt x="2402045" y="165"/>
+                  <a:pt x="2779776" y="0"/>
+                </a:cubicBezTo>
+                <a:cubicBezTo>
+                  <a:pt x="3157507" y="-165"/>
+                  <a:pt x="3286859" y="-15571"/>
+                  <a:pt x="3474720" y="0"/>
+                </a:cubicBezTo>
+                <a:cubicBezTo>
+                  <a:pt x="3474286" y="7551"/>
+                  <a:pt x="3474253" y="9822"/>
+                  <a:pt x="3474720" y="18288"/>
+                </a:cubicBezTo>
+                <a:cubicBezTo>
+                  <a:pt x="3233904" y="29845"/>
+                  <a:pt x="2945134" y="-5256"/>
+                  <a:pt x="2779776" y="18288"/>
+                </a:cubicBezTo>
+                <a:cubicBezTo>
+                  <a:pt x="2614418" y="41832"/>
+                  <a:pt x="2339768" y="22709"/>
+                  <a:pt x="2189074" y="18288"/>
+                </a:cubicBezTo>
+                <a:cubicBezTo>
+                  <a:pt x="2038380" y="13867"/>
+                  <a:pt x="1817434" y="-4947"/>
+                  <a:pt x="1528877" y="18288"/>
+                </a:cubicBezTo>
+                <a:cubicBezTo>
+                  <a:pt x="1240320" y="41523"/>
+                  <a:pt x="1042447" y="37198"/>
+                  <a:pt x="868680" y="18288"/>
+                </a:cubicBezTo>
+                <a:cubicBezTo>
+                  <a:pt x="694913" y="-622"/>
+                  <a:pt x="233232" y="44909"/>
+                  <a:pt x="0" y="18288"/>
+                </a:cubicBezTo>
+                <a:cubicBezTo>
+                  <a:pt x="60" y="11696"/>
+                  <a:pt x="66" y="3758"/>
+                  <a:pt x="0" y="0"/>
+                </a:cubicBezTo>
+                <a:close/>
+              </a:path>
+              <a:path w="3474720" h="18288" stroke="0" extrusionOk="0">
+                <a:moveTo>
+                  <a:pt x="0" y="0"/>
+                </a:moveTo>
+                <a:cubicBezTo>
+                  <a:pt x="202328" y="-14716"/>
+                  <a:pt x="332722" y="-11499"/>
+                  <a:pt x="625450" y="0"/>
+                </a:cubicBezTo>
+                <a:cubicBezTo>
+                  <a:pt x="918178" y="11499"/>
+                  <a:pt x="1096688" y="5123"/>
+                  <a:pt x="1389888" y="0"/>
+                </a:cubicBezTo>
+                <a:cubicBezTo>
+                  <a:pt x="1683088" y="-5123"/>
+                  <a:pt x="1835981" y="-14038"/>
+                  <a:pt x="1980590" y="0"/>
+                </a:cubicBezTo>
+                <a:cubicBezTo>
+                  <a:pt x="2125199" y="14038"/>
+                  <a:pt x="2396099" y="-7203"/>
+                  <a:pt x="2571293" y="0"/>
+                </a:cubicBezTo>
+                <a:cubicBezTo>
+                  <a:pt x="2746487" y="7203"/>
+                  <a:pt x="3041609" y="-12036"/>
+                  <a:pt x="3474720" y="0"/>
+                </a:cubicBezTo>
+                <a:cubicBezTo>
+                  <a:pt x="3474638" y="4406"/>
+                  <a:pt x="3474631" y="9982"/>
+                  <a:pt x="3474720" y="18288"/>
+                </a:cubicBezTo>
+                <a:cubicBezTo>
+                  <a:pt x="3324873" y="21876"/>
+                  <a:pt x="3136771" y="12587"/>
+                  <a:pt x="2814523" y="18288"/>
+                </a:cubicBezTo>
+                <a:cubicBezTo>
+                  <a:pt x="2492275" y="23989"/>
+                  <a:pt x="2294402" y="47111"/>
+                  <a:pt x="2154326" y="18288"/>
+                </a:cubicBezTo>
+                <a:cubicBezTo>
+                  <a:pt x="2014250" y="-10535"/>
+                  <a:pt x="1820317" y="33903"/>
+                  <a:pt x="1494130" y="18288"/>
+                </a:cubicBezTo>
+                <a:cubicBezTo>
+                  <a:pt x="1167943" y="2673"/>
+                  <a:pt x="948432" y="14868"/>
+                  <a:pt x="729691" y="18288"/>
+                </a:cubicBezTo>
+                <a:cubicBezTo>
+                  <a:pt x="510950" y="21708"/>
+                  <a:pt x="264032" y="24354"/>
+                  <a:pt x="0" y="18288"/>
+                </a:cubicBezTo>
+                <a:cubicBezTo>
+                  <a:pt x="189" y="14288"/>
+                  <a:pt x="-703" y="3747"/>
+                  <a:pt x="0" y="0"/>
+                </a:cubicBezTo>
+                <a:close/>
+              </a:path>
+            </a:pathLst>
+          </a:custGeom>
+          <a:solidFill>
+            <a:schemeClr val="accent2"/>
+          </a:solidFill>
+          <a:ln w="44450" cap="rnd">
+            <a:solidFill>
+              <a:schemeClr val="accent2"/>
+            </a:solidFill>
+            <a:round/>
+            <a:extLst>
+              <a:ext uri="{C807C97D-BFC1-408E-A445-0C87EB9F89A2}">
+                <ask:lineSketchStyleProps xmlns:ask="http://schemas.microsoft.com/office/drawing/2018/sketchyshapes" sd="2863741219">
+                  <a:prstGeom prst="rect">
+                    <a:avLst/>
+                  </a:prstGeom>
+                  <ask:type>
+                    <ask:lineSketchFreehand/>
+                  </ask:type>
+                </ask:lineSketchStyleProps>
+              </a:ext>
+            </a:extLst>
+          </a:ln>
+        </p:spPr>
+        <p:style>
+          <a:lnRef idx="2">
+            <a:schemeClr val="accent1">
+              <a:shade val="50000"/>
+            </a:schemeClr>
+          </a:lnRef>
+          <a:fillRef idx="1">
+            <a:schemeClr val="accent1"/>
+          </a:fillRef>
+          <a:effectRef idx="0">
+            <a:schemeClr val="accent1"/>
+          </a:effectRef>
+          <a:fontRef idx="minor">
+            <a:schemeClr val="lt1"/>
+          </a:fontRef>
+        </p:style>
+        <p:txBody>
+          <a:bodyPr rtlCol="0" anchor="ctr"/>
+          <a:lstStyle/>
+          <a:p>
+            <a:pPr algn="ctr"/>
+            <a:endParaRPr lang="en-US"/>
+          </a:p>
+        </p:txBody>
+      </p:sp>
+      <p:sp>
+        <p:nvSpPr>
+          <p:cNvPr id="3" name="Tijdelijke aanduiding voor inhoud 2">
+            <a:extLst>
+              <a:ext uri="{FF2B5EF4-FFF2-40B4-BE49-F238E27FC236}">
+                <a16:creationId xmlns:a16="http://schemas.microsoft.com/office/drawing/2014/main" id="{0A58D8AF-CF65-E78C-12CC-0417B6E408E4}"/>
+              </a:ext>
+            </a:extLst>
+          </p:cNvPr>
+          <p:cNvSpPr>
+            <a:spLocks noGrp="1"/>
+          </p:cNvSpPr>
+          <p:nvPr>
+            <p:ph idx="1"/>
+          </p:nvPr>
+        </p:nvSpPr>
+        <p:spPr>
+          <a:xfrm>
+            <a:off x="640080" y="2872899"/>
+            <a:ext cx="4243589" cy="3320668"/>
+          </a:xfrm>
+        </p:spPr>
+        <p:txBody>
+          <a:bodyPr>
+            <a:normAutofit/>
+          </a:bodyPr>
+          <a:lstStyle/>
+          <a:p>
+            <a:r>
+              <a:rPr lang="en-US" sz="2200"/>
+              <a:t>Voor het coderen</a:t>
+            </a:r>
+          </a:p>
+          <a:p>
+            <a:r>
+              <a:rPr lang="en-US" sz="2200"/>
+              <a:t>Flowchart en Pseudocode</a:t>
+            </a:r>
+          </a:p>
+          <a:p>
+            <a:r>
+              <a:rPr lang="en-US" sz="2200"/>
+              <a:t>Opdract delen</a:t>
+            </a:r>
+          </a:p>
+          <a:p>
+            <a:r>
+              <a:rPr lang="en-US" sz="2200"/>
+              <a:t>Wat moet in wat</a:t>
+            </a:r>
+            <a:endParaRPr lang="nl-NL" sz="2200"/>
+          </a:p>
+        </p:txBody>
+      </p:sp>
+      <p:pic>
+        <p:nvPicPr>
+          <p:cNvPr id="5" name="Afbeelding 4" descr="Programmacodering op een computerscherm">
+            <a:extLst>
+              <a:ext uri="{FF2B5EF4-FFF2-40B4-BE49-F238E27FC236}">
+                <a16:creationId xmlns:a16="http://schemas.microsoft.com/office/drawing/2014/main" id="{492BBA66-1928-316D-149D-78C714CBB784}"/>
+              </a:ext>
+            </a:extLst>
+          </p:cNvPr>
+          <p:cNvPicPr>
+            <a:picLocks noChangeAspect="1"/>
+          </p:cNvPicPr>
+          <p:nvPr/>
+        </p:nvPicPr>
+        <p:blipFill>
+          <a:blip r:embed="rId2">
+            <a:extLst>
+              <a:ext uri="{28A0092B-C50C-407E-A947-70E740481C1C}">
+                <a14:useLocalDpi xmlns:a14="http://schemas.microsoft.com/office/drawing/2010/main" val="0"/>
+              </a:ext>
+            </a:extLst>
+          </a:blip>
+          <a:srcRect l="19443" r="13603" b="-1"/>
+          <a:stretch>
+            <a:fillRect/>
+          </a:stretch>
+        </p:blipFill>
+        <p:spPr>
+          <a:xfrm>
+            <a:off x="5311702" y="10"/>
+            <a:ext cx="6878775" cy="6857990"/>
+          </a:xfrm>
+          <a:custGeom>
+            <a:avLst/>
+            <a:gdLst/>
+            <a:ahLst/>
+            <a:cxnLst/>
+            <a:rect l="l" t="t" r="r" b="b"/>
+            <a:pathLst>
+              <a:path w="6878775" h="6858000">
+                <a:moveTo>
+                  <a:pt x="1102973" y="0"/>
+                </a:moveTo>
+                <a:lnTo>
+                  <a:pt x="1160688" y="0"/>
+                </a:lnTo>
+                <a:lnTo>
+                  <a:pt x="983189" y="331786"/>
+                </a:lnTo>
+                <a:cubicBezTo>
+                  <a:pt x="914866" y="469145"/>
+                  <a:pt x="850355" y="608712"/>
+                  <a:pt x="789261" y="750263"/>
+                </a:cubicBezTo>
+                <a:cubicBezTo>
+                  <a:pt x="774307" y="784928"/>
+                  <a:pt x="759992" y="819849"/>
+                  <a:pt x="745295" y="854514"/>
+                </a:cubicBezTo>
+                <a:cubicBezTo>
+                  <a:pt x="756682" y="845393"/>
+                  <a:pt x="765489" y="833492"/>
+                  <a:pt x="770857" y="819975"/>
+                </a:cubicBezTo>
+                <a:cubicBezTo>
+                  <a:pt x="879943" y="589569"/>
+                  <a:pt x="999605" y="365513"/>
+                  <a:pt x="1131329" y="148742"/>
+                </a:cubicBezTo>
+                <a:lnTo>
+                  <a:pt x="1227589" y="0"/>
+                </a:lnTo>
+                <a:lnTo>
+                  <a:pt x="6878775" y="0"/>
+                </a:lnTo>
+                <a:lnTo>
+                  <a:pt x="6878775" y="6858000"/>
+                </a:lnTo>
+                <a:lnTo>
+                  <a:pt x="713521" y="6858000"/>
+                </a:lnTo>
+                <a:lnTo>
+                  <a:pt x="625642" y="6670527"/>
+                </a:lnTo>
+                <a:cubicBezTo>
+                  <a:pt x="507232" y="6398531"/>
+                  <a:pt x="403083" y="6118381"/>
+                  <a:pt x="312785" y="5830359"/>
+                </a:cubicBezTo>
+                <a:cubicBezTo>
+                  <a:pt x="278149" y="5719759"/>
+                  <a:pt x="248879" y="5607635"/>
+                  <a:pt x="212198" y="5480401"/>
+                </a:cubicBezTo>
+                <a:cubicBezTo>
+                  <a:pt x="212208" y="5491601"/>
+                  <a:pt x="212803" y="5502788"/>
+                  <a:pt x="213988" y="5513923"/>
+                </a:cubicBezTo>
+                <a:cubicBezTo>
+                  <a:pt x="264089" y="5723695"/>
+                  <a:pt x="307290" y="5935370"/>
+                  <a:pt x="365826" y="6142729"/>
+                </a:cubicBezTo>
+                <a:cubicBezTo>
+                  <a:pt x="433152" y="6380817"/>
+                  <a:pt x="510068" y="6614016"/>
+                  <a:pt x="597975" y="6841549"/>
+                </a:cubicBezTo>
+                <a:lnTo>
+                  <a:pt x="604824" y="6858000"/>
+                </a:lnTo>
+                <a:lnTo>
+                  <a:pt x="552056" y="6858000"/>
+                </a:lnTo>
+                <a:lnTo>
+                  <a:pt x="539576" y="6828295"/>
+                </a:lnTo>
+                <a:cubicBezTo>
+                  <a:pt x="380597" y="6414594"/>
+                  <a:pt x="260223" y="5988893"/>
+                  <a:pt x="171555" y="5552906"/>
+                </a:cubicBezTo>
+                <a:cubicBezTo>
+                  <a:pt x="91163" y="5157998"/>
+                  <a:pt x="43746" y="4758899"/>
+                  <a:pt x="12305" y="4357388"/>
+                </a:cubicBezTo>
+                <a:cubicBezTo>
+                  <a:pt x="-14281" y="4013908"/>
+                  <a:pt x="4507" y="3672965"/>
+                  <a:pt x="46684" y="3331516"/>
+                </a:cubicBezTo>
+                <a:cubicBezTo>
+                  <a:pt x="127203" y="2664286"/>
+                  <a:pt x="277819" y="2007265"/>
+                  <a:pt x="496065" y="1371196"/>
+                </a:cubicBezTo>
+                <a:cubicBezTo>
+                  <a:pt x="636273" y="966066"/>
+                  <a:pt x="800445" y="573253"/>
+                  <a:pt x="995723" y="196614"/>
+                </a:cubicBezTo>
+                <a:close/>
+              </a:path>
+            </a:pathLst>
+          </a:custGeom>
+        </p:spPr>
+      </p:pic>
+    </p:spTree>
+    <p:extLst>
+      <p:ext uri="{BB962C8B-B14F-4D97-AF65-F5344CB8AC3E}">
+        <p14:creationId xmlns:p14="http://schemas.microsoft.com/office/powerpoint/2010/main" val="3855490046"/>
+      </p:ext>
+    </p:extLst>
+  </p:cSld>
+  <p:clrMapOvr>
+    <a:masterClrMapping/>
+  </p:clrMapOvr>
+</p:sld>
+</file>
+
+<file path=ppt/slides/slide5.xml><?xml version="1.0" encoding="utf-8"?>
+<p:sld xmlns:a="http://schemas.openxmlformats.org/drawingml/2006/main" xmlns:r="http://schemas.openxmlformats.org/officeDocument/2006/relationships" xmlns:p="http://schemas.openxmlformats.org/presentationml/2006/main">
+  <p:cSld>
+    <p:bg>
+      <p:bgPr>
+        <a:solidFill>
+          <a:schemeClr val="bg1"/>
+        </a:solidFill>
+        <a:effectLst/>
+      </p:bgPr>
+    </p:bg>
+    <p:spTree>
+      <p:nvGrpSpPr>
+        <p:cNvPr id="1" name=""/>
+        <p:cNvGrpSpPr/>
+        <p:nvPr/>
+      </p:nvGrpSpPr>
+      <p:grpSpPr>
+        <a:xfrm>
+          <a:off x="0" y="0"/>
+          <a:ext cx="0" cy="0"/>
+          <a:chOff x="0" y="0"/>
+          <a:chExt cx="0" cy="0"/>
+        </a:xfrm>
+      </p:grpSpPr>
+      <p:sp useBgFill="1">
+        <p:nvSpPr>
+          <p:cNvPr id="9" name="Rectangle 8">
+            <a:extLst>
+              <a:ext uri="{FF2B5EF4-FFF2-40B4-BE49-F238E27FC236}">
+                <a16:creationId xmlns:a16="http://schemas.microsoft.com/office/drawing/2014/main" id="{F13C74B1-5B17-4795-BED0-7140497B445A}"/>
+              </a:ext>
+              <a:ext uri="{C183D7F6-B498-43B3-948B-1728B52AA6E4}">
+                <adec:decorative xmlns:adec="http://schemas.microsoft.com/office/drawing/2017/decorative" val="1"/>
+              </a:ext>
+            </a:extLst>
+          </p:cNvPr>
+          <p:cNvSpPr>
+            <a:spLocks noGrp="1" noRot="1" noChangeAspect="1" noMove="1" noResize="1" noEditPoints="1" noAdjustHandles="1" noChangeArrowheads="1" noChangeShapeType="1" noTextEdit="1"/>
+          </p:cNvSpPr>
+          <p:nvPr>
+            <p:extLst>
+              <p:ext uri="{386F3935-93C4-4BCD-93E2-E3B085C9AB24}">
+                <p16:designElem xmlns:p16="http://schemas.microsoft.com/office/powerpoint/2015/main" val="1"/>
+              </p:ext>
+            </p:extLst>
+          </p:nvPr>
+        </p:nvSpPr>
+        <p:spPr>
+          <a:xfrm>
+            <a:off x="0" y="0"/>
+            <a:ext cx="12188952" cy="6858000"/>
+          </a:xfrm>
+          <a:prstGeom prst="rect">
+            <a:avLst/>
+          </a:prstGeom>
+          <a:ln>
+            <a:noFill/>
+          </a:ln>
+        </p:spPr>
+        <p:style>
+          <a:lnRef idx="2">
+            <a:schemeClr val="accent1">
+              <a:shade val="50000"/>
+            </a:schemeClr>
+          </a:lnRef>
+          <a:fillRef idx="1">
+            <a:schemeClr val="accent1"/>
+          </a:fillRef>
+          <a:effectRef idx="0">
+            <a:schemeClr val="accent1"/>
+          </a:effectRef>
+          <a:fontRef idx="minor">
+            <a:schemeClr val="lt1"/>
+          </a:fontRef>
+        </p:style>
+        <p:txBody>
+          <a:bodyPr rtlCol="0" anchor="ctr"/>
+          <a:lstStyle/>
+          <a:p>
+            <a:pPr algn="ctr"/>
+            <a:endParaRPr lang="en-US"/>
+          </a:p>
+        </p:txBody>
+      </p:sp>
+      <p:sp>
+        <p:nvSpPr>
+          <p:cNvPr id="2" name="Titel 1">
+            <a:extLst>
+              <a:ext uri="{FF2B5EF4-FFF2-40B4-BE49-F238E27FC236}">
+                <a16:creationId xmlns:a16="http://schemas.microsoft.com/office/drawing/2014/main" id="{4E29B848-44E3-0F21-6499-EECBD2CF2D7B}"/>
+              </a:ext>
+            </a:extLst>
+          </p:cNvPr>
+          <p:cNvSpPr>
+            <a:spLocks noGrp="1"/>
+          </p:cNvSpPr>
+          <p:nvPr>
+            <p:ph type="title"/>
+          </p:nvPr>
+        </p:nvSpPr>
+        <p:spPr>
+          <a:xfrm>
+            <a:off x="640080" y="325369"/>
+            <a:ext cx="4368602" cy="1956841"/>
+          </a:xfrm>
+        </p:spPr>
+        <p:txBody>
+          <a:bodyPr anchor="b">
+            <a:normAutofit/>
+          </a:bodyPr>
+          <a:lstStyle/>
+          <a:p>
+            <a:r>
+              <a:rPr lang="en-US" sz="5400" b="1"/>
+              <a:t>PROJECT INHOUD</a:t>
+            </a:r>
+            <a:endParaRPr lang="nl-NL" sz="5400" b="1"/>
+          </a:p>
+        </p:txBody>
+      </p:sp>
+      <p:sp>
+        <p:nvSpPr>
+          <p:cNvPr id="11" name="sketchy line">
+            <a:extLst>
+              <a:ext uri="{FF2B5EF4-FFF2-40B4-BE49-F238E27FC236}">
+                <a16:creationId xmlns:a16="http://schemas.microsoft.com/office/drawing/2014/main" id="{D4974D33-8DC5-464E-8C6D-BE58F0669C17}"/>
+              </a:ext>
+              <a:ext uri="{C183D7F6-B498-43B3-948B-1728B52AA6E4}">
+                <adec:decorative xmlns:adec="http://schemas.microsoft.com/office/drawing/2017/decorative" val="1"/>
+              </a:ext>
+            </a:extLst>
+          </p:cNvPr>
+          <p:cNvSpPr>
+            <a:spLocks noGrp="1" noRot="1" noChangeAspect="1" noMove="1" noResize="1" noEditPoints="1" noAdjustHandles="1" noChangeArrowheads="1" noChangeShapeType="1" noTextEdit="1"/>
+          </p:cNvSpPr>
+          <p:nvPr>
+            <p:extLst>
+              <p:ext uri="{386F3935-93C4-4BCD-93E2-E3B085C9AB24}">
+                <p16:designElem xmlns:p16="http://schemas.microsoft.com/office/powerpoint/2015/main" val="1"/>
+              </p:ext>
+            </p:extLst>
+          </p:nvPr>
+        </p:nvSpPr>
+        <p:spPr>
+          <a:xfrm>
+            <a:off x="640080" y="2586994"/>
+            <a:ext cx="3474720" cy="18288"/>
+          </a:xfrm>
+          <a:custGeom>
+            <a:avLst/>
+            <a:gdLst>
+              <a:gd name="csX0" fmla="*/ 0 w 3474720"/>
+              <a:gd name="csY0" fmla="*/ 0 h 18288"/>
+              <a:gd name="csX1" fmla="*/ 694944 w 3474720"/>
+              <a:gd name="csY1" fmla="*/ 0 h 18288"/>
+              <a:gd name="csX2" fmla="*/ 1355141 w 3474720"/>
+              <a:gd name="csY2" fmla="*/ 0 h 18288"/>
+              <a:gd name="csX3" fmla="*/ 2015338 w 3474720"/>
+              <a:gd name="csY3" fmla="*/ 0 h 18288"/>
+              <a:gd name="csX4" fmla="*/ 2779776 w 3474720"/>
+              <a:gd name="csY4" fmla="*/ 0 h 18288"/>
+              <a:gd name="csX5" fmla="*/ 3474720 w 3474720"/>
+              <a:gd name="csY5" fmla="*/ 0 h 18288"/>
+              <a:gd name="csX6" fmla="*/ 3474720 w 3474720"/>
+              <a:gd name="csY6" fmla="*/ 18288 h 18288"/>
+              <a:gd name="csX7" fmla="*/ 2779776 w 3474720"/>
+              <a:gd name="csY7" fmla="*/ 18288 h 18288"/>
+              <a:gd name="csX8" fmla="*/ 2189074 w 3474720"/>
+              <a:gd name="csY8" fmla="*/ 18288 h 18288"/>
+              <a:gd name="csX9" fmla="*/ 1528877 w 3474720"/>
+              <a:gd name="csY9" fmla="*/ 18288 h 18288"/>
+              <a:gd name="csX10" fmla="*/ 868680 w 3474720"/>
+              <a:gd name="csY10" fmla="*/ 18288 h 18288"/>
+              <a:gd name="csX11" fmla="*/ 0 w 3474720"/>
+              <a:gd name="csY11" fmla="*/ 18288 h 18288"/>
+              <a:gd name="csX12" fmla="*/ 0 w 3474720"/>
+              <a:gd name="csY12" fmla="*/ 0 h 18288"/>
+            </a:gdLst>
+            <a:ahLst/>
+            <a:cxnLst>
+              <a:cxn ang="0">
+                <a:pos x="csX0" y="csY0"/>
+              </a:cxn>
+              <a:cxn ang="0">
+                <a:pos x="csX1" y="csY1"/>
+              </a:cxn>
+              <a:cxn ang="0">
+                <a:pos x="csX2" y="csY2"/>
+              </a:cxn>
+              <a:cxn ang="0">
+                <a:pos x="csX3" y="csY3"/>
+              </a:cxn>
+              <a:cxn ang="0">
+                <a:pos x="csX4" y="csY4"/>
+              </a:cxn>
+              <a:cxn ang="0">
+                <a:pos x="csX5" y="csY5"/>
+              </a:cxn>
+              <a:cxn ang="0">
+                <a:pos x="csX6" y="csY6"/>
+              </a:cxn>
+              <a:cxn ang="0">
+                <a:pos x="csX7" y="csY7"/>
+              </a:cxn>
+              <a:cxn ang="0">
+                <a:pos x="csX8" y="csY8"/>
+              </a:cxn>
+              <a:cxn ang="0">
+                <a:pos x="csX9" y="csY9"/>
+              </a:cxn>
+              <a:cxn ang="0">
+                <a:pos x="csX10" y="csY10"/>
+              </a:cxn>
+              <a:cxn ang="0">
+                <a:pos x="csX11" y="csY11"/>
+              </a:cxn>
+              <a:cxn ang="0">
+                <a:pos x="csX12" y="csY12"/>
+              </a:cxn>
+            </a:cxnLst>
+            <a:rect l="l" t="t" r="r" b="b"/>
+            <a:pathLst>
+              <a:path w="3474720" h="18288" fill="none" extrusionOk="0">
+                <a:moveTo>
+                  <a:pt x="0" y="0"/>
+                </a:moveTo>
+                <a:cubicBezTo>
+                  <a:pt x="224454" y="-14544"/>
+                  <a:pt x="495407" y="26540"/>
+                  <a:pt x="694944" y="0"/>
+                </a:cubicBezTo>
+                <a:cubicBezTo>
+                  <a:pt x="894481" y="-26540"/>
+                  <a:pt x="1130063" y="24713"/>
+                  <a:pt x="1355141" y="0"/>
+                </a:cubicBezTo>
+                <a:cubicBezTo>
+                  <a:pt x="1580219" y="-24713"/>
+                  <a:pt x="1820099" y="26695"/>
+                  <a:pt x="2015338" y="0"/>
+                </a:cubicBezTo>
+                <a:cubicBezTo>
+                  <a:pt x="2210577" y="-26695"/>
+                  <a:pt x="2402045" y="165"/>
+                  <a:pt x="2779776" y="0"/>
+                </a:cubicBezTo>
+                <a:cubicBezTo>
+                  <a:pt x="3157507" y="-165"/>
+                  <a:pt x="3286859" y="-15571"/>
+                  <a:pt x="3474720" y="0"/>
+                </a:cubicBezTo>
+                <a:cubicBezTo>
+                  <a:pt x="3474286" y="7551"/>
+                  <a:pt x="3474253" y="9822"/>
+                  <a:pt x="3474720" y="18288"/>
+                </a:cubicBezTo>
+                <a:cubicBezTo>
+                  <a:pt x="3233904" y="29845"/>
+                  <a:pt x="2945134" y="-5256"/>
+                  <a:pt x="2779776" y="18288"/>
+                </a:cubicBezTo>
+                <a:cubicBezTo>
+                  <a:pt x="2614418" y="41832"/>
+                  <a:pt x="2339768" y="22709"/>
+                  <a:pt x="2189074" y="18288"/>
+                </a:cubicBezTo>
+                <a:cubicBezTo>
+                  <a:pt x="2038380" y="13867"/>
+                  <a:pt x="1817434" y="-4947"/>
+                  <a:pt x="1528877" y="18288"/>
+                </a:cubicBezTo>
+                <a:cubicBezTo>
+                  <a:pt x="1240320" y="41523"/>
+                  <a:pt x="1042447" y="37198"/>
+                  <a:pt x="868680" y="18288"/>
+                </a:cubicBezTo>
+                <a:cubicBezTo>
+                  <a:pt x="694913" y="-622"/>
+                  <a:pt x="233232" y="44909"/>
+                  <a:pt x="0" y="18288"/>
+                </a:cubicBezTo>
+                <a:cubicBezTo>
+                  <a:pt x="60" y="11696"/>
+                  <a:pt x="66" y="3758"/>
+                  <a:pt x="0" y="0"/>
+                </a:cubicBezTo>
+                <a:close/>
+              </a:path>
+              <a:path w="3474720" h="18288" stroke="0" extrusionOk="0">
+                <a:moveTo>
+                  <a:pt x="0" y="0"/>
+                </a:moveTo>
+                <a:cubicBezTo>
+                  <a:pt x="202328" y="-14716"/>
+                  <a:pt x="332722" y="-11499"/>
+                  <a:pt x="625450" y="0"/>
+                </a:cubicBezTo>
+                <a:cubicBezTo>
+                  <a:pt x="918178" y="11499"/>
+                  <a:pt x="1096688" y="5123"/>
+                  <a:pt x="1389888" y="0"/>
+                </a:cubicBezTo>
+                <a:cubicBezTo>
+                  <a:pt x="1683088" y="-5123"/>
+                  <a:pt x="1835981" y="-14038"/>
+                  <a:pt x="1980590" y="0"/>
+                </a:cubicBezTo>
+                <a:cubicBezTo>
+                  <a:pt x="2125199" y="14038"/>
+                  <a:pt x="2396099" y="-7203"/>
+                  <a:pt x="2571293" y="0"/>
+                </a:cubicBezTo>
+                <a:cubicBezTo>
+                  <a:pt x="2746487" y="7203"/>
+                  <a:pt x="3041609" y="-12036"/>
+                  <a:pt x="3474720" y="0"/>
+                </a:cubicBezTo>
+                <a:cubicBezTo>
+                  <a:pt x="3474638" y="4406"/>
+                  <a:pt x="3474631" y="9982"/>
+                  <a:pt x="3474720" y="18288"/>
+                </a:cubicBezTo>
+                <a:cubicBezTo>
+                  <a:pt x="3324873" y="21876"/>
+                  <a:pt x="3136771" y="12587"/>
+                  <a:pt x="2814523" y="18288"/>
+                </a:cubicBezTo>
+                <a:cubicBezTo>
+                  <a:pt x="2492275" y="23989"/>
+                  <a:pt x="2294402" y="47111"/>
+                  <a:pt x="2154326" y="18288"/>
+                </a:cubicBezTo>
+                <a:cubicBezTo>
+                  <a:pt x="2014250" y="-10535"/>
+                  <a:pt x="1820317" y="33903"/>
+                  <a:pt x="1494130" y="18288"/>
+                </a:cubicBezTo>
+                <a:cubicBezTo>
+                  <a:pt x="1167943" y="2673"/>
+                  <a:pt x="948432" y="14868"/>
+                  <a:pt x="729691" y="18288"/>
+                </a:cubicBezTo>
+                <a:cubicBezTo>
+                  <a:pt x="510950" y="21708"/>
+                  <a:pt x="264032" y="24354"/>
+                  <a:pt x="0" y="18288"/>
+                </a:cubicBezTo>
+                <a:cubicBezTo>
+                  <a:pt x="189" y="14288"/>
+                  <a:pt x="-703" y="3747"/>
+                  <a:pt x="0" y="0"/>
+                </a:cubicBezTo>
+                <a:close/>
+              </a:path>
+            </a:pathLst>
+          </a:custGeom>
+          <a:solidFill>
+            <a:schemeClr val="accent2"/>
+          </a:solidFill>
+          <a:ln w="44450" cap="rnd">
+            <a:solidFill>
+              <a:schemeClr val="accent2"/>
+            </a:solidFill>
+            <a:round/>
+            <a:extLst>
+              <a:ext uri="{C807C97D-BFC1-408E-A445-0C87EB9F89A2}">
+                <ask:lineSketchStyleProps xmlns:ask="http://schemas.microsoft.com/office/drawing/2018/sketchyshapes" sd="2863741219">
+                  <a:prstGeom prst="rect">
+                    <a:avLst/>
+                  </a:prstGeom>
+                  <ask:type>
+                    <ask:lineSketchFreehand/>
+                  </ask:type>
+                </ask:lineSketchStyleProps>
+              </a:ext>
+            </a:extLst>
+          </a:ln>
+        </p:spPr>
+        <p:style>
+          <a:lnRef idx="2">
+            <a:schemeClr val="accent1">
+              <a:shade val="50000"/>
+            </a:schemeClr>
+          </a:lnRef>
+          <a:fillRef idx="1">
+            <a:schemeClr val="accent1"/>
+          </a:fillRef>
+          <a:effectRef idx="0">
+            <a:schemeClr val="accent1"/>
+          </a:effectRef>
+          <a:fontRef idx="minor">
+            <a:schemeClr val="lt1"/>
+          </a:fontRef>
+        </p:style>
+        <p:txBody>
+          <a:bodyPr rtlCol="0" anchor="ctr"/>
+          <a:lstStyle/>
+          <a:p>
+            <a:pPr algn="ctr"/>
+            <a:endParaRPr lang="en-US"/>
+          </a:p>
+        </p:txBody>
+      </p:sp>
+      <p:sp>
+        <p:nvSpPr>
+          <p:cNvPr id="3" name="Tijdelijke aanduiding voor inhoud 2">
+            <a:extLst>
+              <a:ext uri="{FF2B5EF4-FFF2-40B4-BE49-F238E27FC236}">
+                <a16:creationId xmlns:a16="http://schemas.microsoft.com/office/drawing/2014/main" id="{BD8D8E5D-64CD-A8DB-80DF-5DAAD601645D}"/>
+              </a:ext>
+            </a:extLst>
+          </p:cNvPr>
+          <p:cNvSpPr>
+            <a:spLocks noGrp="1"/>
+          </p:cNvSpPr>
+          <p:nvPr>
+            <p:ph idx="1"/>
+          </p:nvPr>
+        </p:nvSpPr>
+        <p:spPr>
+          <a:xfrm>
+            <a:off x="640080" y="2872899"/>
+            <a:ext cx="4243589" cy="3320668"/>
+          </a:xfrm>
+        </p:spPr>
+        <p:txBody>
+          <a:bodyPr>
+            <a:normAutofit/>
+          </a:bodyPr>
+          <a:lstStyle/>
+          <a:p>
+            <a:r>
+              <a:rPr lang="en-US" sz="2200"/>
+              <a:t>Main</a:t>
+            </a:r>
+          </a:p>
+          <a:p>
+            <a:r>
+              <a:rPr lang="en-US" sz="2200"/>
+              <a:t>Functions</a:t>
+            </a:r>
+          </a:p>
+          <a:p>
+            <a:r>
+              <a:rPr lang="en-US" sz="2200"/>
+              <a:t>Scorekaart</a:t>
+            </a:r>
+          </a:p>
+          <a:p>
+            <a:pPr>
+              <a:buFontTx/>
+              <a:buChar char="-"/>
+            </a:pPr>
+            <a:endParaRPr lang="nl-NL" sz="2200"/>
+          </a:p>
+        </p:txBody>
+      </p:sp>
+      <p:pic>
+        <p:nvPicPr>
+          <p:cNvPr id="4" name="Afbeelding 3" descr="Real Python code developing screen. Programing workflow abstract algorithm concept. Lines of Python code visible under magnifying lens.">
+            <a:extLst>
+              <a:ext uri="{FF2B5EF4-FFF2-40B4-BE49-F238E27FC236}">
+                <a16:creationId xmlns:a16="http://schemas.microsoft.com/office/drawing/2014/main" id="{2F6F5F79-066E-5676-DDE0-DC0DBF636F3D}"/>
+              </a:ext>
+            </a:extLst>
+          </p:cNvPr>
+          <p:cNvPicPr>
+            <a:picLocks noChangeAspect="1"/>
+          </p:cNvPicPr>
+          <p:nvPr/>
+        </p:nvPicPr>
+        <p:blipFill>
+          <a:blip r:embed="rId2"/>
+          <a:srcRect l="9845" r="23202" b="-1"/>
+          <a:stretch>
+            <a:fillRect/>
+          </a:stretch>
+        </p:blipFill>
+        <p:spPr>
+          <a:xfrm>
+            <a:off x="5311702" y="10"/>
+            <a:ext cx="6878775" cy="6857990"/>
+          </a:xfrm>
+          <a:custGeom>
+            <a:avLst/>
+            <a:gdLst/>
+            <a:ahLst/>
+            <a:cxnLst/>
+            <a:rect l="l" t="t" r="r" b="b"/>
+            <a:pathLst>
+              <a:path w="6878775" h="6858000">
+                <a:moveTo>
+                  <a:pt x="1102973" y="0"/>
+                </a:moveTo>
+                <a:lnTo>
+                  <a:pt x="1160688" y="0"/>
+                </a:lnTo>
+                <a:lnTo>
+                  <a:pt x="983189" y="331786"/>
+                </a:lnTo>
+                <a:cubicBezTo>
+                  <a:pt x="914866" y="469145"/>
+                  <a:pt x="850355" y="608712"/>
+                  <a:pt x="789261" y="750263"/>
+                </a:cubicBezTo>
+                <a:cubicBezTo>
+                  <a:pt x="774307" y="784928"/>
+                  <a:pt x="759992" y="819849"/>
+                  <a:pt x="745295" y="854514"/>
+                </a:cubicBezTo>
+                <a:cubicBezTo>
+                  <a:pt x="756682" y="845393"/>
+                  <a:pt x="765489" y="833492"/>
+                  <a:pt x="770857" y="819975"/>
+                </a:cubicBezTo>
+                <a:cubicBezTo>
+                  <a:pt x="879943" y="589569"/>
+                  <a:pt x="999605" y="365513"/>
+                  <a:pt x="1131329" y="148742"/>
+                </a:cubicBezTo>
+                <a:lnTo>
+                  <a:pt x="1227589" y="0"/>
+                </a:lnTo>
+                <a:lnTo>
+                  <a:pt x="6878775" y="0"/>
+                </a:lnTo>
+                <a:lnTo>
+                  <a:pt x="6878775" y="6858000"/>
+                </a:lnTo>
+                <a:lnTo>
+                  <a:pt x="713521" y="6858000"/>
+                </a:lnTo>
+                <a:lnTo>
+                  <a:pt x="625642" y="6670527"/>
+                </a:lnTo>
+                <a:cubicBezTo>
+                  <a:pt x="507232" y="6398531"/>
+                  <a:pt x="403083" y="6118381"/>
+                  <a:pt x="312785" y="5830359"/>
+                </a:cubicBezTo>
+                <a:cubicBezTo>
+                  <a:pt x="278149" y="5719759"/>
+                  <a:pt x="248879" y="5607635"/>
+                  <a:pt x="212198" y="5480401"/>
+                </a:cubicBezTo>
+                <a:cubicBezTo>
+                  <a:pt x="212208" y="5491601"/>
+                  <a:pt x="212803" y="5502788"/>
+                  <a:pt x="213988" y="5513923"/>
+                </a:cubicBezTo>
+                <a:cubicBezTo>
+                  <a:pt x="264089" y="5723695"/>
+                  <a:pt x="307290" y="5935370"/>
+                  <a:pt x="365826" y="6142729"/>
+                </a:cubicBezTo>
+                <a:cubicBezTo>
+                  <a:pt x="433152" y="6380817"/>
+                  <a:pt x="510068" y="6614016"/>
+                  <a:pt x="597975" y="6841549"/>
+                </a:cubicBezTo>
+                <a:lnTo>
+                  <a:pt x="604824" y="6858000"/>
+                </a:lnTo>
+                <a:lnTo>
+                  <a:pt x="552056" y="6858000"/>
+                </a:lnTo>
+                <a:lnTo>
+                  <a:pt x="539576" y="6828295"/>
+                </a:lnTo>
+                <a:cubicBezTo>
+                  <a:pt x="380597" y="6414594"/>
+                  <a:pt x="260223" y="5988893"/>
+                  <a:pt x="171555" y="5552906"/>
+                </a:cubicBezTo>
+                <a:cubicBezTo>
+                  <a:pt x="91163" y="5157998"/>
+                  <a:pt x="43746" y="4758899"/>
+                  <a:pt x="12305" y="4357388"/>
+                </a:cubicBezTo>
+                <a:cubicBezTo>
+                  <a:pt x="-14281" y="4013908"/>
+                  <a:pt x="4507" y="3672965"/>
+                  <a:pt x="46684" y="3331516"/>
+                </a:cubicBezTo>
+                <a:cubicBezTo>
+                  <a:pt x="127203" y="2664286"/>
+                  <a:pt x="277819" y="2007265"/>
+                  <a:pt x="496065" y="1371196"/>
+                </a:cubicBezTo>
+                <a:cubicBezTo>
+                  <a:pt x="636273" y="966066"/>
+                  <a:pt x="800445" y="573253"/>
+                  <a:pt x="995723" y="196614"/>
+                </a:cubicBezTo>
+                <a:close/>
+              </a:path>
+            </a:pathLst>
+          </a:custGeom>
+        </p:spPr>
+      </p:pic>
+    </p:spTree>
+    <p:extLst>
+      <p:ext uri="{BB962C8B-B14F-4D97-AF65-F5344CB8AC3E}">
+        <p14:creationId xmlns:p14="http://schemas.microsoft.com/office/powerpoint/2010/main" val="3036709479"/>
+      </p:ext>
+    </p:extLst>
+  </p:cSld>
+  <p:clrMapOvr>
+    <a:masterClrMapping/>
+  </p:clrMapOvr>
+</p:sld>
+</file>
+
+<file path=ppt/slides/slide6.xml><?xml version="1.0" encoding="utf-8"?>
+<p:sld xmlns:a="http://schemas.openxmlformats.org/drawingml/2006/main" xmlns:r="http://schemas.openxmlformats.org/officeDocument/2006/relationships" xmlns:p="http://schemas.openxmlformats.org/presentationml/2006/main">
+  <p:cSld>
+    <p:bg>
+      <p:bgPr>
+        <a:solidFill>
+          <a:schemeClr val="bg1"/>
+        </a:solidFill>
+        <a:effectLst/>
+      </p:bgPr>
+    </p:bg>
+    <p:spTree>
+      <p:nvGrpSpPr>
+        <p:cNvPr id="1" name=""/>
+        <p:cNvGrpSpPr/>
+        <p:nvPr/>
+      </p:nvGrpSpPr>
+      <p:grpSpPr>
+        <a:xfrm>
+          <a:off x="0" y="0"/>
+          <a:ext cx="0" cy="0"/>
+          <a:chOff x="0" y="0"/>
+          <a:chExt cx="0" cy="0"/>
+        </a:xfrm>
+      </p:grpSpPr>
+      <p:sp useBgFill="1">
+        <p:nvSpPr>
+          <p:cNvPr id="10" name="Rectangle 9">
+            <a:extLst>
+              <a:ext uri="{FF2B5EF4-FFF2-40B4-BE49-F238E27FC236}">
+                <a16:creationId xmlns:a16="http://schemas.microsoft.com/office/drawing/2014/main" id="{32AEEBC8-9D30-42EF-95F2-386C2653FBF0}"/>
+              </a:ext>
+              <a:ext uri="{C183D7F6-B498-43B3-948B-1728B52AA6E4}">
+                <adec:decorative xmlns:adec="http://schemas.microsoft.com/office/drawing/2017/decorative" val="1"/>
+              </a:ext>
+            </a:extLst>
+          </p:cNvPr>
+          <p:cNvSpPr>
+            <a:spLocks noGrp="1" noRot="1" noChangeAspect="1" noMove="1" noResize="1" noEditPoints="1" noAdjustHandles="1" noChangeArrowheads="1" noChangeShapeType="1" noTextEdit="1"/>
+          </p:cNvSpPr>
+          <p:nvPr>
+            <p:extLst>
+              <p:ext uri="{386F3935-93C4-4BCD-93E2-E3B085C9AB24}">
+                <p16:designElem xmlns:p16="http://schemas.microsoft.com/office/powerpoint/2015/main" val="1"/>
+              </p:ext>
+            </p:extLst>
+          </p:nvPr>
+        </p:nvSpPr>
+        <p:spPr>
+          <a:xfrm>
+            <a:off x="0" y="0"/>
+            <a:ext cx="12192000" cy="6858000"/>
+          </a:xfrm>
+          <a:prstGeom prst="rect">
+            <a:avLst/>
+          </a:prstGeom>
+          <a:ln>
+            <a:noFill/>
+          </a:ln>
+        </p:spPr>
+        <p:style>
+          <a:lnRef idx="2">
+            <a:schemeClr val="accent1">
+              <a:shade val="50000"/>
+            </a:schemeClr>
+          </a:lnRef>
+          <a:fillRef idx="1">
+            <a:schemeClr val="accent1"/>
+          </a:fillRef>
+          <a:effectRef idx="0">
+            <a:schemeClr val="accent1"/>
+          </a:effectRef>
+          <a:fontRef idx="minor">
+            <a:schemeClr val="lt1"/>
+          </a:fontRef>
+        </p:style>
+        <p:txBody>
+          <a:bodyPr rtlCol="0" anchor="ctr"/>
+          <a:lstStyle/>
+          <a:p>
+            <a:pPr algn="ctr"/>
+            <a:endParaRPr lang="en-US"/>
+          </a:p>
+        </p:txBody>
+      </p:sp>
+      <p:sp>
+        <p:nvSpPr>
+          <p:cNvPr id="2" name="Titel 1">
+            <a:extLst>
+              <a:ext uri="{FF2B5EF4-FFF2-40B4-BE49-F238E27FC236}">
+                <a16:creationId xmlns:a16="http://schemas.microsoft.com/office/drawing/2014/main" id="{229F4BFF-27E5-E42F-4230-63636904BD84}"/>
+              </a:ext>
+            </a:extLst>
+          </p:cNvPr>
+          <p:cNvSpPr>
+            <a:spLocks noGrp="1"/>
+          </p:cNvSpPr>
+          <p:nvPr>
+            <p:ph type="title"/>
+          </p:nvPr>
+        </p:nvSpPr>
+        <p:spPr>
+          <a:xfrm>
+            <a:off x="630936" y="502920"/>
+            <a:ext cx="3419856" cy="1463040"/>
+          </a:xfrm>
+        </p:spPr>
+        <p:txBody>
+          <a:bodyPr anchor="ctr">
+            <a:normAutofit/>
+          </a:bodyPr>
+          <a:lstStyle/>
+          <a:p>
+            <a:r>
+              <a:rPr lang="en-US" sz="4800" b="1"/>
+              <a:t>PROJECT CODE</a:t>
+            </a:r>
+            <a:endParaRPr lang="nl-NL" sz="4800" b="1"/>
+          </a:p>
+        </p:txBody>
+      </p:sp>
+      <p:sp>
+        <p:nvSpPr>
+          <p:cNvPr id="12" name="sketch line">
+            <a:extLst>
+              <a:ext uri="{FF2B5EF4-FFF2-40B4-BE49-F238E27FC236}">
+                <a16:creationId xmlns:a16="http://schemas.microsoft.com/office/drawing/2014/main" id="{2E92FA66-67D7-4CB4-94D3-E643A9AD4757}"/>
+              </a:ext>
+              <a:ext uri="{C183D7F6-B498-43B3-948B-1728B52AA6E4}">
+                <adec:decorative xmlns:adec="http://schemas.microsoft.com/office/drawing/2017/decorative" val="1"/>
+              </a:ext>
+            </a:extLst>
+          </p:cNvPr>
+          <p:cNvSpPr>
+            <a:spLocks noGrp="1" noRot="1" noChangeAspect="1" noMove="1" noResize="1" noEditPoints="1" noAdjustHandles="1" noChangeArrowheads="1" noChangeShapeType="1" noTextEdit="1"/>
+          </p:cNvSpPr>
+          <p:nvPr>
+            <p:extLst>
+              <p:ext uri="{386F3935-93C4-4BCD-93E2-E3B085C9AB24}">
+                <p16:designElem xmlns:p16="http://schemas.microsoft.com/office/powerpoint/2015/main" val="1"/>
+              </p:ext>
+            </p:extLst>
+          </p:nvPr>
+        </p:nvSpPr>
+        <p:spPr>
+          <a:xfrm rot="5400000">
+            <a:off x="3566159" y="1225296"/>
+            <a:ext cx="1554480" cy="18288"/>
+          </a:xfrm>
+          <a:custGeom>
+            <a:avLst/>
+            <a:gdLst>
+              <a:gd name="csX0" fmla="*/ 0 w 1554480"/>
+              <a:gd name="csY0" fmla="*/ 0 h 18288"/>
+              <a:gd name="csX1" fmla="*/ 549250 w 1554480"/>
+              <a:gd name="csY1" fmla="*/ 0 h 18288"/>
+              <a:gd name="csX2" fmla="*/ 1082954 w 1554480"/>
+              <a:gd name="csY2" fmla="*/ 0 h 18288"/>
+              <a:gd name="csX3" fmla="*/ 1554480 w 1554480"/>
+              <a:gd name="csY3" fmla="*/ 0 h 18288"/>
+              <a:gd name="csX4" fmla="*/ 1554480 w 1554480"/>
+              <a:gd name="csY4" fmla="*/ 18288 h 18288"/>
+              <a:gd name="csX5" fmla="*/ 1067410 w 1554480"/>
+              <a:gd name="csY5" fmla="*/ 18288 h 18288"/>
+              <a:gd name="csX6" fmla="*/ 549250 w 1554480"/>
+              <a:gd name="csY6" fmla="*/ 18288 h 18288"/>
+              <a:gd name="csX7" fmla="*/ 0 w 1554480"/>
+              <a:gd name="csY7" fmla="*/ 18288 h 18288"/>
+              <a:gd name="csX8" fmla="*/ 0 w 1554480"/>
+              <a:gd name="csY8" fmla="*/ 0 h 18288"/>
+            </a:gdLst>
+            <a:ahLst/>
+            <a:cxnLst>
+              <a:cxn ang="0">
+                <a:pos x="csX0" y="csY0"/>
+              </a:cxn>
+              <a:cxn ang="0">
+                <a:pos x="csX1" y="csY1"/>
+              </a:cxn>
+              <a:cxn ang="0">
+                <a:pos x="csX2" y="csY2"/>
+              </a:cxn>
+              <a:cxn ang="0">
+                <a:pos x="csX3" y="csY3"/>
+              </a:cxn>
+              <a:cxn ang="0">
+                <a:pos x="csX4" y="csY4"/>
+              </a:cxn>
+              <a:cxn ang="0">
+                <a:pos x="csX5" y="csY5"/>
+              </a:cxn>
+              <a:cxn ang="0">
+                <a:pos x="csX6" y="csY6"/>
+              </a:cxn>
+              <a:cxn ang="0">
+                <a:pos x="csX7" y="csY7"/>
+              </a:cxn>
+              <a:cxn ang="0">
+                <a:pos x="csX8" y="csY8"/>
+              </a:cxn>
+            </a:cxnLst>
+            <a:rect l="l" t="t" r="r" b="b"/>
+            <a:pathLst>
+              <a:path w="1554480" h="18288" fill="none" extrusionOk="0">
+                <a:moveTo>
+                  <a:pt x="0" y="0"/>
+                </a:moveTo>
+                <a:cubicBezTo>
+                  <a:pt x="114141" y="-19864"/>
+                  <a:pt x="345055" y="-1657"/>
+                  <a:pt x="549250" y="0"/>
+                </a:cubicBezTo>
+                <a:cubicBezTo>
+                  <a:pt x="753445" y="1657"/>
+                  <a:pt x="862292" y="-5674"/>
+                  <a:pt x="1082954" y="0"/>
+                </a:cubicBezTo>
+                <a:cubicBezTo>
+                  <a:pt x="1303616" y="5674"/>
+                  <a:pt x="1363530" y="4537"/>
+                  <a:pt x="1554480" y="0"/>
+                </a:cubicBezTo>
+                <a:cubicBezTo>
+                  <a:pt x="1554963" y="7176"/>
+                  <a:pt x="1553909" y="13682"/>
+                  <a:pt x="1554480" y="18288"/>
+                </a:cubicBezTo>
+                <a:cubicBezTo>
+                  <a:pt x="1338847" y="6127"/>
+                  <a:pt x="1215066" y="37851"/>
+                  <a:pt x="1067410" y="18288"/>
+                </a:cubicBezTo>
+                <a:cubicBezTo>
+                  <a:pt x="919754" y="-1275"/>
+                  <a:pt x="800465" y="3080"/>
+                  <a:pt x="549250" y="18288"/>
+                </a:cubicBezTo>
+                <a:cubicBezTo>
+                  <a:pt x="298035" y="33496"/>
+                  <a:pt x="158868" y="22769"/>
+                  <a:pt x="0" y="18288"/>
+                </a:cubicBezTo>
+                <a:cubicBezTo>
+                  <a:pt x="-655" y="13237"/>
+                  <a:pt x="709" y="4645"/>
+                  <a:pt x="0" y="0"/>
+                </a:cubicBezTo>
+                <a:close/>
+              </a:path>
+              <a:path w="1554480" h="18288" stroke="0" extrusionOk="0">
+                <a:moveTo>
+                  <a:pt x="0" y="0"/>
+                </a:moveTo>
+                <a:cubicBezTo>
+                  <a:pt x="249941" y="-58"/>
+                  <a:pt x="367334" y="23448"/>
+                  <a:pt x="502615" y="0"/>
+                </a:cubicBezTo>
+                <a:cubicBezTo>
+                  <a:pt x="637897" y="-23448"/>
+                  <a:pt x="813653" y="-20418"/>
+                  <a:pt x="974141" y="0"/>
+                </a:cubicBezTo>
+                <a:cubicBezTo>
+                  <a:pt x="1134629" y="20418"/>
+                  <a:pt x="1268772" y="6288"/>
+                  <a:pt x="1554480" y="0"/>
+                </a:cubicBezTo>
+                <a:cubicBezTo>
+                  <a:pt x="1554917" y="7222"/>
+                  <a:pt x="1555359" y="13299"/>
+                  <a:pt x="1554480" y="18288"/>
+                </a:cubicBezTo>
+                <a:cubicBezTo>
+                  <a:pt x="1336087" y="12172"/>
+                  <a:pt x="1310024" y="19759"/>
+                  <a:pt x="1067410" y="18288"/>
+                </a:cubicBezTo>
+                <a:cubicBezTo>
+                  <a:pt x="824796" y="16818"/>
+                  <a:pt x="787902" y="34647"/>
+                  <a:pt x="518160" y="18288"/>
+                </a:cubicBezTo>
+                <a:cubicBezTo>
+                  <a:pt x="248418" y="1930"/>
+                  <a:pt x="133160" y="9205"/>
+                  <a:pt x="0" y="18288"/>
+                </a:cubicBezTo>
+                <a:cubicBezTo>
+                  <a:pt x="-643" y="9451"/>
+                  <a:pt x="-340" y="7114"/>
+                  <a:pt x="0" y="0"/>
+                </a:cubicBezTo>
+                <a:close/>
+              </a:path>
+            </a:pathLst>
+          </a:custGeom>
+          <a:solidFill>
+            <a:schemeClr val="accent2"/>
+          </a:solidFill>
+          <a:ln w="41275" cap="rnd">
+            <a:solidFill>
+              <a:schemeClr val="accent2"/>
+            </a:solidFill>
+            <a:round/>
+            <a:extLst>
+              <a:ext uri="{C807C97D-BFC1-408E-A445-0C87EB9F89A2}">
+                <ask:lineSketchStyleProps xmlns:ask="http://schemas.microsoft.com/office/drawing/2018/sketchyshapes" sd="1219033472">
+                  <a:prstGeom prst="rect">
+                    <a:avLst/>
+                  </a:prstGeom>
+                  <ask:type>
+                    <ask:lineSketchFreehand/>
+                  </ask:type>
+                </ask:lineSketchStyleProps>
+              </a:ext>
+            </a:extLst>
+          </a:ln>
+        </p:spPr>
+        <p:style>
+          <a:lnRef idx="2">
+            <a:schemeClr val="accent1">
+              <a:shade val="50000"/>
+            </a:schemeClr>
+          </a:lnRef>
+          <a:fillRef idx="1">
+            <a:schemeClr val="accent1"/>
+          </a:fillRef>
+          <a:effectRef idx="0">
+            <a:schemeClr val="accent1"/>
+          </a:effectRef>
+          <a:fontRef idx="minor">
+            <a:schemeClr val="lt1"/>
+          </a:fontRef>
+        </p:style>
+        <p:txBody>
+          <a:bodyPr rtlCol="0" anchor="ctr"/>
+          <a:lstStyle/>
+          <a:p>
+            <a:pPr algn="ctr"/>
+            <a:endParaRPr lang="en-US"/>
+          </a:p>
+        </p:txBody>
+      </p:sp>
+      <p:sp>
+        <p:nvSpPr>
+          <p:cNvPr id="3" name="Tijdelijke aanduiding voor inhoud 2">
+            <a:extLst>
+              <a:ext uri="{FF2B5EF4-FFF2-40B4-BE49-F238E27FC236}">
+                <a16:creationId xmlns:a16="http://schemas.microsoft.com/office/drawing/2014/main" id="{2F372719-CC1F-E78E-4B47-560340FBF65D}"/>
+              </a:ext>
+            </a:extLst>
+          </p:cNvPr>
+          <p:cNvSpPr>
+            <a:spLocks noGrp="1"/>
+          </p:cNvSpPr>
+          <p:nvPr>
+            <p:ph idx="1"/>
+          </p:nvPr>
+        </p:nvSpPr>
+        <p:spPr>
+          <a:xfrm>
+            <a:off x="4654295" y="502920"/>
+            <a:ext cx="6894576" cy="1463040"/>
+          </a:xfrm>
+        </p:spPr>
+        <p:txBody>
+          <a:bodyPr anchor="ctr">
+            <a:normAutofit/>
+          </a:bodyPr>
+          <a:lstStyle/>
+          <a:p>
+            <a:r>
+              <a:rPr lang="en-US" sz="2200"/>
+              <a:t>Code waarop ik trots ben</a:t>
+            </a:r>
+          </a:p>
+          <a:p>
+            <a:r>
+              <a:rPr lang="en-US" sz="2200"/>
+              <a:t>Meerdere wedstrijden</a:t>
+            </a:r>
+            <a:endParaRPr lang="nl-NL" sz="2200"/>
+          </a:p>
+        </p:txBody>
+      </p:sp>
+      <p:pic>
+        <p:nvPicPr>
+          <p:cNvPr id="5" name="Afbeelding 4">
+            <a:extLst>
+              <a:ext uri="{FF2B5EF4-FFF2-40B4-BE49-F238E27FC236}">
+                <a16:creationId xmlns:a16="http://schemas.microsoft.com/office/drawing/2014/main" id="{D963EBB7-8FE1-CC62-5C30-688285F15408}"/>
+              </a:ext>
+            </a:extLst>
+          </p:cNvPr>
+          <p:cNvPicPr>
+            <a:picLocks noChangeAspect="1"/>
+          </p:cNvPicPr>
+          <p:nvPr/>
+        </p:nvPicPr>
+        <p:blipFill>
+          <a:blip r:embed="rId2"/>
+          <a:stretch>
+            <a:fillRect/>
+          </a:stretch>
+        </p:blipFill>
+        <p:spPr>
+          <a:xfrm>
+            <a:off x="630936" y="3397177"/>
+            <a:ext cx="10917936" cy="1746869"/>
+          </a:xfrm>
+          <a:prstGeom prst="rect">
+            <a:avLst/>
+          </a:prstGeom>
+        </p:spPr>
+      </p:pic>
+    </p:spTree>
+    <p:extLst>
+      <p:ext uri="{BB962C8B-B14F-4D97-AF65-F5344CB8AC3E}">
+        <p14:creationId xmlns:p14="http://schemas.microsoft.com/office/powerpoint/2010/main" val="2072399340"/>
+      </p:ext>
+    </p:extLst>
+  </p:cSld>
+  <p:clrMapOvr>
+    <a:masterClrMapping/>
+  </p:clrMapOvr>
+</p:sld>
+</file>
+
+<file path=ppt/slides/slide7.xml><?xml version="1.0" encoding="utf-8"?>
+<p:sld xmlns:a="http://schemas.openxmlformats.org/drawingml/2006/main" xmlns:r="http://schemas.openxmlformats.org/officeDocument/2006/relationships" xmlns:p="http://schemas.openxmlformats.org/presentationml/2006/main">
+  <p:cSld>
+    <p:spTree>
+      <p:nvGrpSpPr>
+        <p:cNvPr id="1" name=""/>
+        <p:cNvGrpSpPr/>
+        <p:nvPr/>
+      </p:nvGrpSpPr>
+      <p:grpSpPr>
+        <a:xfrm>
+          <a:off x="0" y="0"/>
+          <a:ext cx="0" cy="0"/>
+          <a:chOff x="0" y="0"/>
+          <a:chExt cx="0" cy="0"/>
+        </a:xfrm>
+      </p:grpSpPr>
+      <p:sp>
+        <p:nvSpPr>
+          <p:cNvPr id="2" name="Titel 1">
+            <a:extLst>
+              <a:ext uri="{FF2B5EF4-FFF2-40B4-BE49-F238E27FC236}">
+                <a16:creationId xmlns:a16="http://schemas.microsoft.com/office/drawing/2014/main" id="{3F564542-47D3-3B08-B459-D79850CE2477}"/>
+              </a:ext>
+            </a:extLst>
+          </p:cNvPr>
+          <p:cNvSpPr>
+            <a:spLocks noGrp="1"/>
+          </p:cNvSpPr>
+          <p:nvPr>
+            <p:ph type="title"/>
+          </p:nvPr>
+        </p:nvSpPr>
+        <p:spPr/>
+        <p:txBody>
+          <a:bodyPr/>
+          <a:lstStyle/>
+          <a:p>
+            <a:r>
+              <a:rPr lang="en-US" b="1"/>
+              <a:t>PROJECT GEBRUIKSAANWIJZING</a:t>
+            </a:r>
+            <a:endParaRPr lang="nl-NL" b="1"/>
+          </a:p>
+        </p:txBody>
+      </p:sp>
+      <p:sp>
+        <p:nvSpPr>
+          <p:cNvPr id="3" name="Tijdelijke aanduiding voor inhoud 2">
+            <a:extLst>
+              <a:ext uri="{FF2B5EF4-FFF2-40B4-BE49-F238E27FC236}">
+                <a16:creationId xmlns:a16="http://schemas.microsoft.com/office/drawing/2014/main" id="{A25D6D11-0F3C-7AA7-C549-3F406BFC9344}"/>
+              </a:ext>
+            </a:extLst>
+          </p:cNvPr>
+          <p:cNvSpPr>
+            <a:spLocks noGrp="1"/>
+          </p:cNvSpPr>
+          <p:nvPr>
+            <p:ph idx="1"/>
+          </p:nvPr>
+        </p:nvSpPr>
+        <p:spPr>
+          <a:xfrm>
+            <a:off x="838200" y="1825625"/>
+            <a:ext cx="10710672" cy="533527"/>
+          </a:xfrm>
+        </p:spPr>
+        <p:txBody>
+          <a:bodyPr>
+            <a:normAutofit fontScale="92500"/>
+          </a:bodyPr>
+          <a:lstStyle/>
+          <a:p>
+            <a:pPr marL="0" indent="0">
+              <a:buNone/>
+            </a:pPr>
+            <a:r>
+              <a:rPr lang="en-US"/>
+              <a:t>Stukje van de Gebruiksaanwijzing: &gt; </a:t>
+            </a:r>
+            <a:r>
+              <a:rPr lang="en-US">
+                <a:hlinkClick r:id="rId2" action="ppaction://hlinkfile"/>
+              </a:rPr>
+              <a:t>Gebruiksaanwijzing Yahtzee.docx</a:t>
+            </a:r>
+            <a:endParaRPr lang="en-US"/>
+          </a:p>
+          <a:p>
+            <a:pPr marL="0" indent="0">
+              <a:buNone/>
+            </a:pPr>
+            <a:endParaRPr lang="nl-NL"/>
+          </a:p>
+        </p:txBody>
+      </p:sp>
+      <p:pic>
+        <p:nvPicPr>
+          <p:cNvPr id="5" name="Afbeelding 4">
+            <a:extLst>
+              <a:ext uri="{FF2B5EF4-FFF2-40B4-BE49-F238E27FC236}">
+                <a16:creationId xmlns:a16="http://schemas.microsoft.com/office/drawing/2014/main" id="{F02C1B69-5943-0A6B-3E59-9CB5EA45430A}"/>
+              </a:ext>
+            </a:extLst>
+          </p:cNvPr>
+          <p:cNvPicPr>
+            <a:picLocks noChangeAspect="1"/>
+          </p:cNvPicPr>
+          <p:nvPr/>
+        </p:nvPicPr>
+        <p:blipFill>
+          <a:blip r:embed="rId3"/>
+          <a:stretch>
+            <a:fillRect/>
+          </a:stretch>
+        </p:blipFill>
+        <p:spPr>
+          <a:xfrm>
+            <a:off x="3922453" y="2494089"/>
+            <a:ext cx="4347094" cy="3945349"/>
+          </a:xfrm>
+          <a:prstGeom prst="rect">
+            <a:avLst/>
+          </a:prstGeom>
+        </p:spPr>
+      </p:pic>
+    </p:spTree>
+    <p:extLst>
+      <p:ext uri="{BB962C8B-B14F-4D97-AF65-F5344CB8AC3E}">
+        <p14:creationId xmlns:p14="http://schemas.microsoft.com/office/powerpoint/2010/main" val="701694524"/>
       </p:ext>
     </p:extLst>
   </p:cSld>
